--- a/public/decks/iyinoluwa-don-taiwo-projects.pptx
+++ b/public/decks/iyinoluwa-don-taiwo-projects.pptx
@@ -3112,7 +3112,7 @@
         <p:spPr>
           <a:xfrm>
             <a:off x="8092440" y="0"/>
-            <a:ext cx="4114800" cy="6858000"/>
+            <a:ext cx="4096512" cy="6858000"/>
           </a:xfrm>
           <a:prstGeom prst="rect">
             <a:avLst/>
@@ -3154,8 +3154,8 @@
         </p:nvSpPr>
         <p:spPr>
           <a:xfrm>
-            <a:off x="8321040" y="1325880"/>
-            <a:ext cx="4389120" cy="4389120"/>
+            <a:off x="8229600" y="1645920"/>
+            <a:ext cx="3749039" cy="3749039"/>
           </a:xfrm>
           <a:prstGeom prst="ellipse">
             <a:avLst/>
@@ -3197,8 +3197,8 @@
         </p:nvSpPr>
         <p:spPr>
           <a:xfrm>
-            <a:off x="8915400" y="1920239"/>
-            <a:ext cx="3200400" cy="3200400"/>
+            <a:off x="8732520" y="2148840"/>
+            <a:ext cx="2743200" cy="2743200"/>
           </a:xfrm>
           <a:prstGeom prst="ellipse">
             <a:avLst/>
@@ -3240,8 +3240,8 @@
         </p:nvSpPr>
         <p:spPr>
           <a:xfrm>
-            <a:off x="9509759" y="2514600"/>
-            <a:ext cx="2011680" cy="2011680"/>
+            <a:off x="9235440" y="2651760"/>
+            <a:ext cx="1737360" cy="1737360"/>
           </a:xfrm>
           <a:prstGeom prst="ellipse">
             <a:avLst/>
@@ -4044,7 +4044,50 @@
       </p:sp>
       <p:sp>
         <p:nvSpPr>
-          <p:cNvPr id="9" name="Rectangle 8"/>
+          <p:cNvPr id="9" name="TextBox 8"/>
+          <p:cNvSpPr txBox="1"/>
+          <p:nvPr/>
+        </p:nvSpPr>
+        <p:spPr>
+          <a:xfrm>
+            <a:off x="658368" y="5394960"/>
+            <a:ext cx="5303520" cy="201168"/>
+          </a:xfrm>
+          <a:prstGeom prst="rect">
+            <a:avLst/>
+          </a:prstGeom>
+          <a:noFill/>
+        </p:spPr>
+        <p:txBody>
+          <a:bodyPr wrap="square" lIns="0" rIns="0" tIns="0" bIns="0" anchor="t">
+            <a:spAutoFit/>
+          </a:bodyPr>
+          <a:lstStyle/>
+          <a:p>
+            <a:pPr algn="l">
+              <a:spcBef>
+                <a:spcPts val="0"/>
+              </a:spcBef>
+              <a:spcAft>
+                <a:spcPts val="0"/>
+              </a:spcAft>
+            </a:pPr>
+            <a:r>
+              <a:rPr sz="850" b="1" i="0" u="sng">
+                <a:solidFill>
+                  <a:srgbClr val="5A48EF"/>
+                </a:solidFill>
+                <a:latin typeface="Aptos"/>
+                <a:hlinkClick r:id="rId2"/>
+              </a:rPr>
+              <a:t>Repository: github.com/IyinoluwaDon/acl-tear-detection</a:t>
+            </a:r>
+          </a:p>
+        </p:txBody>
+      </p:sp>
+      <p:sp>
+        <p:nvSpPr>
+          <p:cNvPr id="10" name="Rectangle 9"/>
           <p:cNvSpPr/>
           <p:nvPr/>
         </p:nvSpPr>
@@ -4087,7 +4130,7 @@
       </p:sp>
       <p:sp>
         <p:nvSpPr>
-          <p:cNvPr id="10" name="TextBox 9"/>
+          <p:cNvPr id="11" name="TextBox 10"/>
           <p:cNvSpPr txBox="1"/>
           <p:nvPr/>
         </p:nvSpPr>
@@ -4129,7 +4172,7 @@
       </p:sp>
       <p:sp>
         <p:nvSpPr>
-          <p:cNvPr id="11" name="Rectangle 10"/>
+          <p:cNvPr id="12" name="Rectangle 11"/>
           <p:cNvSpPr/>
           <p:nvPr/>
         </p:nvSpPr>
@@ -4174,7 +4217,7 @@
       </p:sp>
       <p:sp>
         <p:nvSpPr>
-          <p:cNvPr id="12" name="Oval 11"/>
+          <p:cNvPr id="13" name="Oval 12"/>
           <p:cNvSpPr/>
           <p:nvPr/>
         </p:nvSpPr>
@@ -4217,7 +4260,7 @@
       </p:sp>
       <p:sp>
         <p:nvSpPr>
-          <p:cNvPr id="13" name="Oval 12"/>
+          <p:cNvPr id="14" name="Oval 13"/>
           <p:cNvSpPr/>
           <p:nvPr/>
         </p:nvSpPr>
@@ -4260,7 +4303,7 @@
       </p:sp>
       <p:sp>
         <p:nvSpPr>
-          <p:cNvPr id="14" name="Rectangle 13"/>
+          <p:cNvPr id="15" name="Rectangle 14"/>
           <p:cNvSpPr/>
           <p:nvPr/>
         </p:nvSpPr>
@@ -4305,7 +4348,7 @@
       </p:sp>
       <p:sp>
         <p:nvSpPr>
-          <p:cNvPr id="15" name="Oval 14"/>
+          <p:cNvPr id="16" name="Oval 15"/>
           <p:cNvSpPr/>
           <p:nvPr/>
         </p:nvSpPr>
@@ -4348,7 +4391,7 @@
       </p:sp>
       <p:sp>
         <p:nvSpPr>
-          <p:cNvPr id="16" name="Oval 15"/>
+          <p:cNvPr id="17" name="Oval 16"/>
           <p:cNvSpPr/>
           <p:nvPr/>
         </p:nvSpPr>
@@ -4391,7 +4434,7 @@
       </p:sp>
       <p:sp>
         <p:nvSpPr>
-          <p:cNvPr id="17" name="Rectangle 16"/>
+          <p:cNvPr id="18" name="Rectangle 17"/>
           <p:cNvSpPr/>
           <p:nvPr/>
         </p:nvSpPr>
@@ -4436,7 +4479,7 @@
       </p:sp>
       <p:sp>
         <p:nvSpPr>
-          <p:cNvPr id="18" name="Oval 17"/>
+          <p:cNvPr id="19" name="Oval 18"/>
           <p:cNvSpPr/>
           <p:nvPr/>
         </p:nvSpPr>
@@ -4479,7 +4522,7 @@
       </p:sp>
       <p:sp>
         <p:nvSpPr>
-          <p:cNvPr id="19" name="Oval 18"/>
+          <p:cNvPr id="20" name="Oval 19"/>
           <p:cNvSpPr/>
           <p:nvPr/>
         </p:nvSpPr>
@@ -4522,7 +4565,7 @@
       </p:sp>
       <p:sp>
         <p:nvSpPr>
-          <p:cNvPr id="20" name="Rectangle 19"/>
+          <p:cNvPr id="21" name="Rectangle 20"/>
           <p:cNvSpPr/>
           <p:nvPr/>
         </p:nvSpPr>
@@ -4565,7 +4608,7 @@
       </p:sp>
       <p:sp>
         <p:nvSpPr>
-          <p:cNvPr id="21" name="TextBox 20"/>
+          <p:cNvPr id="22" name="TextBox 21"/>
           <p:cNvSpPr txBox="1"/>
           <p:nvPr/>
         </p:nvSpPr>
@@ -4607,7 +4650,7 @@
       </p:sp>
       <p:sp>
         <p:nvSpPr>
-          <p:cNvPr id="22" name="TextBox 21"/>
+          <p:cNvPr id="23" name="TextBox 22"/>
           <p:cNvSpPr txBox="1"/>
           <p:nvPr/>
         </p:nvSpPr>
@@ -4649,7 +4692,7 @@
       </p:sp>
       <p:cxnSp>
         <p:nvCxnSpPr>
-          <p:cNvPr id="23" name="Connector 22"/>
+          <p:cNvPr id="24" name="Connector 23"/>
           <p:cNvCxnSpPr/>
           <p:nvPr/>
         </p:nvCxnSpPr>
@@ -4684,7 +4727,7 @@
       </p:cxnSp>
       <p:sp>
         <p:nvSpPr>
-          <p:cNvPr id="24" name="TextBox 23"/>
+          <p:cNvPr id="25" name="TextBox 24"/>
           <p:cNvSpPr txBox="1"/>
           <p:nvPr/>
         </p:nvSpPr>
@@ -4726,7 +4769,7 @@
       </p:sp>
       <p:sp>
         <p:nvSpPr>
-          <p:cNvPr id="25" name="TextBox 24"/>
+          <p:cNvPr id="26" name="TextBox 25"/>
           <p:cNvSpPr txBox="1"/>
           <p:nvPr/>
         </p:nvSpPr>
@@ -4761,7 +4804,7 @@
                 </a:solidFill>
                 <a:latin typeface="Aptos"/>
               </a:rPr>
-              <a:t>02 / 08</a:t>
+              <a:t>2 / 8</a:t>
             </a:r>
           </a:p>
         </p:txBody>
@@ -5123,7 +5166,50 @@
       </p:sp>
       <p:sp>
         <p:nvSpPr>
-          <p:cNvPr id="10" name="Rectangle 9"/>
+          <p:cNvPr id="10" name="TextBox 9"/>
+          <p:cNvSpPr txBox="1"/>
+          <p:nvPr/>
+        </p:nvSpPr>
+        <p:spPr>
+          <a:xfrm>
+            <a:off x="621792" y="5367528"/>
+            <a:ext cx="5394960" cy="201168"/>
+          </a:xfrm>
+          <a:prstGeom prst="rect">
+            <a:avLst/>
+          </a:prstGeom>
+          <a:noFill/>
+        </p:spPr>
+        <p:txBody>
+          <a:bodyPr wrap="square" lIns="0" rIns="0" tIns="0" bIns="0" anchor="t">
+            <a:spAutoFit/>
+          </a:bodyPr>
+          <a:lstStyle/>
+          <a:p>
+            <a:pPr algn="l">
+              <a:spcBef>
+                <a:spcPts val="0"/>
+              </a:spcBef>
+              <a:spcAft>
+                <a:spcPts val="0"/>
+              </a:spcAft>
+            </a:pPr>
+            <a:r>
+              <a:rPr sz="780" b="1" i="0" u="sng">
+                <a:solidFill>
+                  <a:srgbClr val="5A48EF"/>
+                </a:solidFill>
+                <a:latin typeface="Aptos"/>
+                <a:hlinkClick r:id="rId2"/>
+              </a:rPr>
+              <a:t>Repository: github.com/IyinoluwaDon/ecommerce-listing-consistency-detector</a:t>
+            </a:r>
+          </a:p>
+        </p:txBody>
+      </p:sp>
+      <p:sp>
+        <p:nvSpPr>
+          <p:cNvPr id="11" name="Rectangle 10"/>
           <p:cNvSpPr/>
           <p:nvPr/>
         </p:nvSpPr>
@@ -5166,7 +5252,7 @@
       </p:sp>
       <p:sp>
         <p:nvSpPr>
-          <p:cNvPr id="11" name="TextBox 10"/>
+          <p:cNvPr id="12" name="TextBox 11"/>
           <p:cNvSpPr txBox="1"/>
           <p:nvPr/>
         </p:nvSpPr>
@@ -5208,7 +5294,7 @@
       </p:sp>
       <p:sp>
         <p:nvSpPr>
-          <p:cNvPr id="12" name="TextBox 11"/>
+          <p:cNvPr id="13" name="TextBox 12"/>
           <p:cNvSpPr txBox="1"/>
           <p:nvPr/>
         </p:nvSpPr>
@@ -5250,7 +5336,7 @@
       </p:sp>
       <p:sp>
         <p:nvSpPr>
-          <p:cNvPr id="13" name="Rectangle 12"/>
+          <p:cNvPr id="14" name="Rectangle 13"/>
           <p:cNvSpPr/>
           <p:nvPr/>
         </p:nvSpPr>
@@ -5293,7 +5379,7 @@
       </p:sp>
       <p:sp>
         <p:nvSpPr>
-          <p:cNvPr id="14" name="Rectangle 13"/>
+          <p:cNvPr id="15" name="Rectangle 14"/>
           <p:cNvSpPr/>
           <p:nvPr/>
         </p:nvSpPr>
@@ -5336,7 +5422,7 @@
       </p:sp>
       <p:sp>
         <p:nvSpPr>
-          <p:cNvPr id="15" name="TextBox 14"/>
+          <p:cNvPr id="16" name="TextBox 15"/>
           <p:cNvSpPr txBox="1"/>
           <p:nvPr/>
         </p:nvSpPr>
@@ -5378,7 +5464,7 @@
       </p:sp>
       <p:sp>
         <p:nvSpPr>
-          <p:cNvPr id="16" name="TextBox 15"/>
+          <p:cNvPr id="17" name="TextBox 16"/>
           <p:cNvSpPr txBox="1"/>
           <p:nvPr/>
         </p:nvSpPr>
@@ -5420,7 +5506,7 @@
       </p:sp>
       <p:sp>
         <p:nvSpPr>
-          <p:cNvPr id="17" name="Rectangle 16"/>
+          <p:cNvPr id="18" name="Rectangle 17"/>
           <p:cNvSpPr/>
           <p:nvPr/>
         </p:nvSpPr>
@@ -5463,7 +5549,7 @@
       </p:sp>
       <p:sp>
         <p:nvSpPr>
-          <p:cNvPr id="18" name="Rectangle 17"/>
+          <p:cNvPr id="19" name="Rectangle 18"/>
           <p:cNvSpPr/>
           <p:nvPr/>
         </p:nvSpPr>
@@ -5506,7 +5592,7 @@
       </p:sp>
       <p:sp>
         <p:nvSpPr>
-          <p:cNvPr id="19" name="TextBox 18"/>
+          <p:cNvPr id="20" name="TextBox 19"/>
           <p:cNvSpPr txBox="1"/>
           <p:nvPr/>
         </p:nvSpPr>
@@ -5548,7 +5634,7 @@
       </p:sp>
       <p:sp>
         <p:nvSpPr>
-          <p:cNvPr id="20" name="TextBox 19"/>
+          <p:cNvPr id="21" name="TextBox 20"/>
           <p:cNvSpPr txBox="1"/>
           <p:nvPr/>
         </p:nvSpPr>
@@ -5590,7 +5676,7 @@
       </p:sp>
       <p:sp>
         <p:nvSpPr>
-          <p:cNvPr id="21" name="Rectangle 20"/>
+          <p:cNvPr id="22" name="Rectangle 21"/>
           <p:cNvSpPr/>
           <p:nvPr/>
         </p:nvSpPr>
@@ -5633,7 +5719,7 @@
       </p:sp>
       <p:sp>
         <p:nvSpPr>
-          <p:cNvPr id="22" name="Rectangle 21"/>
+          <p:cNvPr id="23" name="Rectangle 22"/>
           <p:cNvSpPr/>
           <p:nvPr/>
         </p:nvSpPr>
@@ -5676,7 +5762,7 @@
       </p:sp>
       <p:sp>
         <p:nvSpPr>
-          <p:cNvPr id="23" name="TextBox 22"/>
+          <p:cNvPr id="24" name="TextBox 23"/>
           <p:cNvSpPr txBox="1"/>
           <p:nvPr/>
         </p:nvSpPr>
@@ -5718,7 +5804,7 @@
       </p:sp>
       <p:sp>
         <p:nvSpPr>
-          <p:cNvPr id="24" name="TextBox 23"/>
+          <p:cNvPr id="25" name="TextBox 24"/>
           <p:cNvSpPr txBox="1"/>
           <p:nvPr/>
         </p:nvSpPr>
@@ -5760,7 +5846,7 @@
       </p:sp>
       <p:cxnSp>
         <p:nvCxnSpPr>
-          <p:cNvPr id="25" name="Connector 24"/>
+          <p:cNvPr id="26" name="Connector 25"/>
           <p:cNvCxnSpPr/>
           <p:nvPr/>
         </p:nvCxnSpPr>
@@ -5795,7 +5881,7 @@
       </p:cxnSp>
       <p:sp>
         <p:nvSpPr>
-          <p:cNvPr id="26" name="TextBox 25"/>
+          <p:cNvPr id="27" name="TextBox 26"/>
           <p:cNvSpPr txBox="1"/>
           <p:nvPr/>
         </p:nvSpPr>
@@ -5837,7 +5923,7 @@
       </p:sp>
       <p:sp>
         <p:nvSpPr>
-          <p:cNvPr id="27" name="TextBox 26"/>
+          <p:cNvPr id="28" name="TextBox 27"/>
           <p:cNvSpPr txBox="1"/>
           <p:nvPr/>
         </p:nvSpPr>
@@ -5872,7 +5958,7 @@
                 </a:solidFill>
                 <a:latin typeface="Aptos"/>
               </a:rPr>
-              <a:t>03 / 08</a:t>
+              <a:t>3 / 8</a:t>
             </a:r>
           </a:p>
         </p:txBody>
@@ -6150,7 +6236,50 @@
       </p:sp>
       <p:sp>
         <p:nvSpPr>
-          <p:cNvPr id="8" name="Rectangle 7"/>
+          <p:cNvPr id="8" name="TextBox 7"/>
+          <p:cNvSpPr txBox="1"/>
+          <p:nvPr/>
+        </p:nvSpPr>
+        <p:spPr>
+          <a:xfrm>
+            <a:off x="621792" y="5193792"/>
+            <a:ext cx="5212080" cy="201168"/>
+          </a:xfrm>
+          <a:prstGeom prst="rect">
+            <a:avLst/>
+          </a:prstGeom>
+          <a:noFill/>
+        </p:spPr>
+        <p:txBody>
+          <a:bodyPr wrap="square" lIns="0" rIns="0" tIns="0" bIns="0" anchor="t">
+            <a:spAutoFit/>
+          </a:bodyPr>
+          <a:lstStyle/>
+          <a:p>
+            <a:pPr algn="l">
+              <a:spcBef>
+                <a:spcPts val="0"/>
+              </a:spcBef>
+              <a:spcAft>
+                <a:spcPts val="0"/>
+              </a:spcAft>
+            </a:pPr>
+            <a:r>
+              <a:rPr sz="780" b="1" i="0" u="sng">
+                <a:solidFill>
+                  <a:srgbClr val="5A48EF"/>
+                </a:solidFill>
+                <a:latin typeface="Aptos"/>
+                <a:hlinkClick r:id="rId2"/>
+              </a:rPr>
+              <a:t>Repository: github.com/IyinoluwaDon/Omo-Forest-Deforestation-Forecasting</a:t>
+            </a:r>
+          </a:p>
+        </p:txBody>
+      </p:sp>
+      <p:sp>
+        <p:nvSpPr>
+          <p:cNvPr id="9" name="Rectangle 8"/>
           <p:cNvSpPr/>
           <p:nvPr/>
         </p:nvSpPr>
@@ -6193,7 +6322,7 @@
       </p:sp>
       <p:sp>
         <p:nvSpPr>
-          <p:cNvPr id="9" name="TextBox 8"/>
+          <p:cNvPr id="10" name="TextBox 9"/>
           <p:cNvSpPr txBox="1"/>
           <p:nvPr/>
         </p:nvSpPr>
@@ -6235,7 +6364,7 @@
       </p:sp>
       <p:sp>
         <p:nvSpPr>
-          <p:cNvPr id="10" name="TextBox 9"/>
+          <p:cNvPr id="11" name="TextBox 10"/>
           <p:cNvSpPr txBox="1"/>
           <p:nvPr/>
         </p:nvSpPr>
@@ -6277,7 +6406,7 @@
       </p:sp>
       <p:sp>
         <p:nvSpPr>
-          <p:cNvPr id="11" name="TextBox 10"/>
+          <p:cNvPr id="12" name="TextBox 11"/>
           <p:cNvSpPr txBox="1"/>
           <p:nvPr/>
         </p:nvSpPr>
@@ -6319,7 +6448,7 @@
       </p:sp>
       <p:sp>
         <p:nvSpPr>
-          <p:cNvPr id="12" name="Rectangle 11"/>
+          <p:cNvPr id="13" name="Rectangle 12"/>
           <p:cNvSpPr/>
           <p:nvPr/>
         </p:nvSpPr>
@@ -6362,7 +6491,7 @@
       </p:sp>
       <p:sp>
         <p:nvSpPr>
-          <p:cNvPr id="13" name="Rectangle 12"/>
+          <p:cNvPr id="14" name="Rectangle 13"/>
           <p:cNvSpPr/>
           <p:nvPr/>
         </p:nvSpPr>
@@ -6405,7 +6534,7 @@
       </p:sp>
       <p:sp>
         <p:nvSpPr>
-          <p:cNvPr id="14" name="TextBox 13"/>
+          <p:cNvPr id="15" name="TextBox 14"/>
           <p:cNvSpPr txBox="1"/>
           <p:nvPr/>
         </p:nvSpPr>
@@ -6447,7 +6576,7 @@
       </p:sp>
       <p:sp>
         <p:nvSpPr>
-          <p:cNvPr id="15" name="TextBox 14"/>
+          <p:cNvPr id="16" name="TextBox 15"/>
           <p:cNvSpPr txBox="1"/>
           <p:nvPr/>
         </p:nvSpPr>
@@ -6489,7 +6618,7 @@
       </p:sp>
       <p:sp>
         <p:nvSpPr>
-          <p:cNvPr id="16" name="Rectangle 15"/>
+          <p:cNvPr id="17" name="Rectangle 16"/>
           <p:cNvSpPr/>
           <p:nvPr/>
         </p:nvSpPr>
@@ -6532,7 +6661,7 @@
       </p:sp>
       <p:sp>
         <p:nvSpPr>
-          <p:cNvPr id="17" name="Rectangle 16"/>
+          <p:cNvPr id="18" name="Rectangle 17"/>
           <p:cNvSpPr/>
           <p:nvPr/>
         </p:nvSpPr>
@@ -6575,7 +6704,7 @@
       </p:sp>
       <p:sp>
         <p:nvSpPr>
-          <p:cNvPr id="18" name="TextBox 17"/>
+          <p:cNvPr id="19" name="TextBox 18"/>
           <p:cNvSpPr txBox="1"/>
           <p:nvPr/>
         </p:nvSpPr>
@@ -6617,7 +6746,7 @@
       </p:sp>
       <p:sp>
         <p:nvSpPr>
-          <p:cNvPr id="19" name="TextBox 18"/>
+          <p:cNvPr id="20" name="TextBox 19"/>
           <p:cNvSpPr txBox="1"/>
           <p:nvPr/>
         </p:nvSpPr>
@@ -6659,7 +6788,7 @@
       </p:sp>
       <p:sp>
         <p:nvSpPr>
-          <p:cNvPr id="20" name="TextBox 19"/>
+          <p:cNvPr id="21" name="TextBox 20"/>
           <p:cNvSpPr txBox="1"/>
           <p:nvPr/>
         </p:nvSpPr>
@@ -6701,7 +6830,7 @@
       </p:sp>
       <p:sp>
         <p:nvSpPr>
-          <p:cNvPr id="21" name="Rectangle 20"/>
+          <p:cNvPr id="22" name="Rectangle 21"/>
           <p:cNvSpPr/>
           <p:nvPr/>
         </p:nvSpPr>
@@ -6744,7 +6873,7 @@
       </p:sp>
       <p:sp>
         <p:nvSpPr>
-          <p:cNvPr id="22" name="Rectangle 21"/>
+          <p:cNvPr id="23" name="Rectangle 22"/>
           <p:cNvSpPr/>
           <p:nvPr/>
         </p:nvSpPr>
@@ -6787,7 +6916,7 @@
       </p:sp>
       <p:sp>
         <p:nvSpPr>
-          <p:cNvPr id="23" name="TextBox 22"/>
+          <p:cNvPr id="24" name="TextBox 23"/>
           <p:cNvSpPr txBox="1"/>
           <p:nvPr/>
         </p:nvSpPr>
@@ -6829,7 +6958,7 @@
       </p:sp>
       <p:sp>
         <p:nvSpPr>
-          <p:cNvPr id="24" name="TextBox 23"/>
+          <p:cNvPr id="25" name="TextBox 24"/>
           <p:cNvSpPr txBox="1"/>
           <p:nvPr/>
         </p:nvSpPr>
@@ -6871,7 +7000,7 @@
       </p:sp>
       <p:sp>
         <p:nvSpPr>
-          <p:cNvPr id="25" name="Rectangle 24"/>
+          <p:cNvPr id="26" name="Rectangle 25"/>
           <p:cNvSpPr/>
           <p:nvPr/>
         </p:nvSpPr>
@@ -6914,7 +7043,7 @@
       </p:sp>
       <p:sp>
         <p:nvSpPr>
-          <p:cNvPr id="26" name="Rectangle 25"/>
+          <p:cNvPr id="27" name="Rectangle 26"/>
           <p:cNvSpPr/>
           <p:nvPr/>
         </p:nvSpPr>
@@ -6957,7 +7086,7 @@
       </p:sp>
       <p:sp>
         <p:nvSpPr>
-          <p:cNvPr id="27" name="TextBox 26"/>
+          <p:cNvPr id="28" name="TextBox 27"/>
           <p:cNvSpPr txBox="1"/>
           <p:nvPr/>
         </p:nvSpPr>
@@ -6999,7 +7128,7 @@
       </p:sp>
       <p:sp>
         <p:nvSpPr>
-          <p:cNvPr id="28" name="TextBox 27"/>
+          <p:cNvPr id="29" name="TextBox 28"/>
           <p:cNvSpPr txBox="1"/>
           <p:nvPr/>
         </p:nvSpPr>
@@ -7041,7 +7170,7 @@
       </p:sp>
       <p:cxnSp>
         <p:nvCxnSpPr>
-          <p:cNvPr id="29" name="Connector 28"/>
+          <p:cNvPr id="30" name="Connector 29"/>
           <p:cNvCxnSpPr/>
           <p:nvPr/>
         </p:nvCxnSpPr>
@@ -7076,7 +7205,7 @@
       </p:cxnSp>
       <p:sp>
         <p:nvSpPr>
-          <p:cNvPr id="30" name="TextBox 29"/>
+          <p:cNvPr id="31" name="TextBox 30"/>
           <p:cNvSpPr txBox="1"/>
           <p:nvPr/>
         </p:nvSpPr>
@@ -7118,7 +7247,7 @@
       </p:sp>
       <p:sp>
         <p:nvSpPr>
-          <p:cNvPr id="31" name="TextBox 30"/>
+          <p:cNvPr id="32" name="TextBox 31"/>
           <p:cNvSpPr txBox="1"/>
           <p:nvPr/>
         </p:nvSpPr>
@@ -7153,7 +7282,7 @@
                 </a:solidFill>
                 <a:latin typeface="Aptos"/>
               </a:rPr>
-              <a:t>04 / 08</a:t>
+              <a:t>4 / 8</a:t>
             </a:r>
           </a:p>
         </p:txBody>
@@ -7473,7 +7602,50 @@
       </p:sp>
       <p:sp>
         <p:nvSpPr>
-          <p:cNvPr id="9" name="Rectangle 8"/>
+          <p:cNvPr id="9" name="TextBox 8"/>
+          <p:cNvSpPr txBox="1"/>
+          <p:nvPr/>
+        </p:nvSpPr>
+        <p:spPr>
+          <a:xfrm>
+            <a:off x="658368" y="5468112"/>
+            <a:ext cx="5303520" cy="201168"/>
+          </a:xfrm>
+          <a:prstGeom prst="rect">
+            <a:avLst/>
+          </a:prstGeom>
+          <a:noFill/>
+        </p:spPr>
+        <p:txBody>
+          <a:bodyPr wrap="square" lIns="0" rIns="0" tIns="0" bIns="0" anchor="t">
+            <a:spAutoFit/>
+          </a:bodyPr>
+          <a:lstStyle/>
+          <a:p>
+            <a:pPr algn="l">
+              <a:spcBef>
+                <a:spcPts val="0"/>
+              </a:spcBef>
+              <a:spcAft>
+                <a:spcPts val="0"/>
+              </a:spcAft>
+            </a:pPr>
+            <a:r>
+              <a:rPr sz="850" b="1" i="0" u="sng">
+                <a:solidFill>
+                  <a:srgbClr val="5A48EF"/>
+                </a:solidFill>
+                <a:latin typeface="Aptos"/>
+                <a:hlinkClick r:id="rId2"/>
+              </a:rPr>
+              <a:t>Repository: github.com/IyinoluwaDon/C10-team-Ethopie</a:t>
+            </a:r>
+          </a:p>
+        </p:txBody>
+      </p:sp>
+      <p:sp>
+        <p:nvSpPr>
+          <p:cNvPr id="10" name="Rectangle 9"/>
           <p:cNvSpPr/>
           <p:nvPr/>
         </p:nvSpPr>
@@ -7516,7 +7688,7 @@
       </p:sp>
       <p:sp>
         <p:nvSpPr>
-          <p:cNvPr id="10" name="TextBox 9"/>
+          <p:cNvPr id="11" name="TextBox 10"/>
           <p:cNvSpPr txBox="1"/>
           <p:nvPr/>
         </p:nvSpPr>
@@ -7558,7 +7730,7 @@
       </p:sp>
       <p:sp>
         <p:nvSpPr>
-          <p:cNvPr id="11" name="TextBox 10"/>
+          <p:cNvPr id="12" name="TextBox 11"/>
           <p:cNvSpPr txBox="1"/>
           <p:nvPr/>
         </p:nvSpPr>
@@ -7600,7 +7772,7 @@
       </p:sp>
       <p:sp>
         <p:nvSpPr>
-          <p:cNvPr id="12" name="Rectangle 11"/>
+          <p:cNvPr id="13" name="Rectangle 12"/>
           <p:cNvSpPr/>
           <p:nvPr/>
         </p:nvSpPr>
@@ -7643,7 +7815,7 @@
       </p:sp>
       <p:sp>
         <p:nvSpPr>
-          <p:cNvPr id="13" name="TextBox 12"/>
+          <p:cNvPr id="14" name="TextBox 13"/>
           <p:cNvSpPr txBox="1"/>
           <p:nvPr/>
         </p:nvSpPr>
@@ -7685,7 +7857,7 @@
       </p:sp>
       <p:sp>
         <p:nvSpPr>
-          <p:cNvPr id="14" name="TextBox 13"/>
+          <p:cNvPr id="15" name="TextBox 14"/>
           <p:cNvSpPr txBox="1"/>
           <p:nvPr/>
         </p:nvSpPr>
@@ -7727,7 +7899,7 @@
       </p:sp>
       <p:sp>
         <p:nvSpPr>
-          <p:cNvPr id="15" name="Rectangle 14"/>
+          <p:cNvPr id="16" name="Rectangle 15"/>
           <p:cNvSpPr/>
           <p:nvPr/>
         </p:nvSpPr>
@@ -7770,7 +7942,7 @@
       </p:sp>
       <p:sp>
         <p:nvSpPr>
-          <p:cNvPr id="16" name="Rectangle 15"/>
+          <p:cNvPr id="17" name="Rectangle 16"/>
           <p:cNvSpPr/>
           <p:nvPr/>
         </p:nvSpPr>
@@ -7813,7 +7985,7 @@
       </p:sp>
       <p:sp>
         <p:nvSpPr>
-          <p:cNvPr id="17" name="TextBox 16"/>
+          <p:cNvPr id="18" name="TextBox 17"/>
           <p:cNvSpPr txBox="1"/>
           <p:nvPr/>
         </p:nvSpPr>
@@ -7855,7 +8027,7 @@
       </p:sp>
       <p:sp>
         <p:nvSpPr>
-          <p:cNvPr id="18" name="TextBox 17"/>
+          <p:cNvPr id="19" name="TextBox 18"/>
           <p:cNvSpPr txBox="1"/>
           <p:nvPr/>
         </p:nvSpPr>
@@ -7897,7 +8069,7 @@
       </p:sp>
       <p:sp>
         <p:nvSpPr>
-          <p:cNvPr id="19" name="TextBox 18"/>
+          <p:cNvPr id="20" name="TextBox 19"/>
           <p:cNvSpPr txBox="1"/>
           <p:nvPr/>
         </p:nvSpPr>
@@ -7939,7 +8111,7 @@
       </p:sp>
       <p:cxnSp>
         <p:nvCxnSpPr>
-          <p:cNvPr id="20" name="Connector 19"/>
+          <p:cNvPr id="21" name="Connector 20"/>
           <p:cNvCxnSpPr/>
           <p:nvPr/>
         </p:nvCxnSpPr>
@@ -7974,7 +8146,7 @@
       </p:cxnSp>
       <p:sp>
         <p:nvSpPr>
-          <p:cNvPr id="21" name="TextBox 20"/>
+          <p:cNvPr id="22" name="TextBox 21"/>
           <p:cNvSpPr txBox="1"/>
           <p:nvPr/>
         </p:nvSpPr>
@@ -8016,7 +8188,7 @@
       </p:sp>
       <p:sp>
         <p:nvSpPr>
-          <p:cNvPr id="22" name="TextBox 21"/>
+          <p:cNvPr id="23" name="TextBox 22"/>
           <p:cNvSpPr txBox="1"/>
           <p:nvPr/>
         </p:nvSpPr>
@@ -8051,7 +8223,7 @@
                 </a:solidFill>
                 <a:latin typeface="Aptos"/>
               </a:rPr>
-              <a:t>05 / 08</a:t>
+              <a:t>5 / 8</a:t>
             </a:r>
           </a:p>
         </p:txBody>
@@ -8367,7 +8539,50 @@
       </p:sp>
       <p:sp>
         <p:nvSpPr>
-          <p:cNvPr id="8" name="Rectangle 7"/>
+          <p:cNvPr id="8" name="TextBox 7"/>
+          <p:cNvSpPr txBox="1"/>
+          <p:nvPr/>
+        </p:nvSpPr>
+        <p:spPr>
+          <a:xfrm>
+            <a:off x="621792" y="5513832"/>
+            <a:ext cx="5166360" cy="201168"/>
+          </a:xfrm>
+          <a:prstGeom prst="rect">
+            <a:avLst/>
+          </a:prstGeom>
+          <a:noFill/>
+        </p:spPr>
+        <p:txBody>
+          <a:bodyPr wrap="square" lIns="0" rIns="0" tIns="0" bIns="0" anchor="t">
+            <a:spAutoFit/>
+          </a:bodyPr>
+          <a:lstStyle/>
+          <a:p>
+            <a:pPr algn="l">
+              <a:spcBef>
+                <a:spcPts val="0"/>
+              </a:spcBef>
+              <a:spcAft>
+                <a:spcPts val="0"/>
+              </a:spcAft>
+            </a:pPr>
+            <a:r>
+              <a:rPr sz="780" b="1" i="0" u="sng">
+                <a:solidFill>
+                  <a:srgbClr val="5A48EF"/>
+                </a:solidFill>
+                <a:latin typeface="Aptos"/>
+                <a:hlinkClick r:id="rId2"/>
+              </a:rPr>
+              <a:t>Repository: github.com/IyinoluwaDon/Water-body-detection--Sentinel-2</a:t>
+            </a:r>
+          </a:p>
+        </p:txBody>
+      </p:sp>
+      <p:sp>
+        <p:nvSpPr>
+          <p:cNvPr id="9" name="Rectangle 8"/>
           <p:cNvSpPr/>
           <p:nvPr/>
         </p:nvSpPr>
@@ -8410,7 +8625,7 @@
       </p:sp>
       <p:sp>
         <p:nvSpPr>
-          <p:cNvPr id="9" name="TextBox 8"/>
+          <p:cNvPr id="10" name="TextBox 9"/>
           <p:cNvSpPr txBox="1"/>
           <p:nvPr/>
         </p:nvSpPr>
@@ -8452,7 +8667,7 @@
       </p:sp>
       <p:sp>
         <p:nvSpPr>
-          <p:cNvPr id="10" name="Rectangle 9"/>
+          <p:cNvPr id="11" name="Rectangle 10"/>
           <p:cNvSpPr/>
           <p:nvPr/>
         </p:nvSpPr>
@@ -8497,7 +8712,7 @@
       </p:sp>
       <p:sp>
         <p:nvSpPr>
-          <p:cNvPr id="11" name="TextBox 10"/>
+          <p:cNvPr id="12" name="TextBox 11"/>
           <p:cNvSpPr txBox="1"/>
           <p:nvPr/>
         </p:nvSpPr>
@@ -8539,7 +8754,7 @@
       </p:sp>
       <p:sp>
         <p:nvSpPr>
-          <p:cNvPr id="12" name="TextBox 11"/>
+          <p:cNvPr id="13" name="TextBox 12"/>
           <p:cNvSpPr txBox="1"/>
           <p:nvPr/>
         </p:nvSpPr>
@@ -8581,7 +8796,7 @@
       </p:sp>
       <p:sp>
         <p:nvSpPr>
-          <p:cNvPr id="13" name="Rectangle 12"/>
+          <p:cNvPr id="14" name="Rectangle 13"/>
           <p:cNvSpPr/>
           <p:nvPr/>
         </p:nvSpPr>
@@ -8626,7 +8841,7 @@
       </p:sp>
       <p:sp>
         <p:nvSpPr>
-          <p:cNvPr id="14" name="TextBox 13"/>
+          <p:cNvPr id="15" name="TextBox 14"/>
           <p:cNvSpPr txBox="1"/>
           <p:nvPr/>
         </p:nvSpPr>
@@ -8668,7 +8883,7 @@
       </p:sp>
       <p:sp>
         <p:nvSpPr>
-          <p:cNvPr id="15" name="TextBox 14"/>
+          <p:cNvPr id="16" name="TextBox 15"/>
           <p:cNvSpPr txBox="1"/>
           <p:nvPr/>
         </p:nvSpPr>
@@ -8710,7 +8925,7 @@
       </p:sp>
       <p:sp>
         <p:nvSpPr>
-          <p:cNvPr id="16" name="Rectangle 15"/>
+          <p:cNvPr id="17" name="Rectangle 16"/>
           <p:cNvSpPr/>
           <p:nvPr/>
         </p:nvSpPr>
@@ -8755,7 +8970,7 @@
       </p:sp>
       <p:sp>
         <p:nvSpPr>
-          <p:cNvPr id="17" name="TextBox 16"/>
+          <p:cNvPr id="18" name="TextBox 17"/>
           <p:cNvSpPr txBox="1"/>
           <p:nvPr/>
         </p:nvSpPr>
@@ -8797,7 +9012,7 @@
       </p:sp>
       <p:sp>
         <p:nvSpPr>
-          <p:cNvPr id="18" name="TextBox 17"/>
+          <p:cNvPr id="19" name="TextBox 18"/>
           <p:cNvSpPr txBox="1"/>
           <p:nvPr/>
         </p:nvSpPr>
@@ -8839,7 +9054,7 @@
       </p:sp>
       <p:cxnSp>
         <p:nvCxnSpPr>
-          <p:cNvPr id="19" name="Connector 18"/>
+          <p:cNvPr id="20" name="Connector 19"/>
           <p:cNvCxnSpPr/>
           <p:nvPr/>
         </p:nvCxnSpPr>
@@ -8874,7 +9089,7 @@
       </p:cxnSp>
       <p:cxnSp>
         <p:nvCxnSpPr>
-          <p:cNvPr id="20" name="Connector 19"/>
+          <p:cNvPr id="21" name="Connector 20"/>
           <p:cNvCxnSpPr/>
           <p:nvPr/>
         </p:nvCxnSpPr>
@@ -8909,7 +9124,7 @@
       </p:cxnSp>
       <p:sp>
         <p:nvSpPr>
-          <p:cNvPr id="21" name="Rectangle 20"/>
+          <p:cNvPr id="22" name="Rectangle 21"/>
           <p:cNvSpPr/>
           <p:nvPr/>
         </p:nvSpPr>
@@ -8952,7 +9167,7 @@
       </p:sp>
       <p:sp>
         <p:nvSpPr>
-          <p:cNvPr id="22" name="TextBox 21"/>
+          <p:cNvPr id="23" name="TextBox 22"/>
           <p:cNvSpPr txBox="1"/>
           <p:nvPr/>
         </p:nvSpPr>
@@ -8994,7 +9209,7 @@
       </p:sp>
       <p:sp>
         <p:nvSpPr>
-          <p:cNvPr id="23" name="TextBox 22"/>
+          <p:cNvPr id="24" name="TextBox 23"/>
           <p:cNvSpPr txBox="1"/>
           <p:nvPr/>
         </p:nvSpPr>
@@ -9036,7 +9251,7 @@
       </p:sp>
       <p:cxnSp>
         <p:nvCxnSpPr>
-          <p:cNvPr id="24" name="Connector 23"/>
+          <p:cNvPr id="25" name="Connector 24"/>
           <p:cNvCxnSpPr/>
           <p:nvPr/>
         </p:nvCxnSpPr>
@@ -9071,7 +9286,7 @@
       </p:cxnSp>
       <p:sp>
         <p:nvSpPr>
-          <p:cNvPr id="25" name="TextBox 24"/>
+          <p:cNvPr id="26" name="TextBox 25"/>
           <p:cNvSpPr txBox="1"/>
           <p:nvPr/>
         </p:nvSpPr>
@@ -9113,7 +9328,7 @@
       </p:sp>
       <p:sp>
         <p:nvSpPr>
-          <p:cNvPr id="26" name="TextBox 25"/>
+          <p:cNvPr id="27" name="TextBox 26"/>
           <p:cNvSpPr txBox="1"/>
           <p:nvPr/>
         </p:nvSpPr>
@@ -9148,7 +9363,7 @@
                 </a:solidFill>
                 <a:latin typeface="Aptos"/>
               </a:rPr>
-              <a:t>06 / 08</a:t>
+              <a:t>6 / 8</a:t>
             </a:r>
           </a:p>
         </p:txBody>
@@ -9464,7 +9679,50 @@
       </p:sp>
       <p:sp>
         <p:nvSpPr>
-          <p:cNvPr id="8" name="Rectangle 7"/>
+          <p:cNvPr id="8" name="TextBox 7"/>
+          <p:cNvSpPr txBox="1"/>
+          <p:nvPr/>
+        </p:nvSpPr>
+        <p:spPr>
+          <a:xfrm>
+            <a:off x="621792" y="5513832"/>
+            <a:ext cx="4937760" cy="201168"/>
+          </a:xfrm>
+          <a:prstGeom prst="rect">
+            <a:avLst/>
+          </a:prstGeom>
+          <a:noFill/>
+        </p:spPr>
+        <p:txBody>
+          <a:bodyPr wrap="square" lIns="0" rIns="0" tIns="0" bIns="0" anchor="t">
+            <a:spAutoFit/>
+          </a:bodyPr>
+          <a:lstStyle/>
+          <a:p>
+            <a:pPr algn="l">
+              <a:spcBef>
+                <a:spcPts val="0"/>
+              </a:spcBef>
+              <a:spcAft>
+                <a:spcPts val="0"/>
+              </a:spcAft>
+            </a:pPr>
+            <a:r>
+              <a:rPr sz="850" b="1" i="0" u="sng">
+                <a:solidFill>
+                  <a:srgbClr val="5A48EF"/>
+                </a:solidFill>
+                <a:latin typeface="Aptos"/>
+                <a:hlinkClick r:id="rId2"/>
+              </a:rPr>
+              <a:t>Repository: github.com/IyinoluwaDon/Shebamiles-EMS</a:t>
+            </a:r>
+          </a:p>
+        </p:txBody>
+      </p:sp>
+      <p:sp>
+        <p:nvSpPr>
+          <p:cNvPr id="9" name="Rectangle 8"/>
           <p:cNvSpPr/>
           <p:nvPr/>
         </p:nvSpPr>
@@ -9507,7 +9765,7 @@
       </p:sp>
       <p:sp>
         <p:nvSpPr>
-          <p:cNvPr id="9" name="TextBox 8"/>
+          <p:cNvPr id="10" name="TextBox 9"/>
           <p:cNvSpPr txBox="1"/>
           <p:nvPr/>
         </p:nvSpPr>
@@ -9549,7 +9807,7 @@
       </p:sp>
       <p:sp>
         <p:nvSpPr>
-          <p:cNvPr id="10" name="Rectangle 9"/>
+          <p:cNvPr id="11" name="Rectangle 10"/>
           <p:cNvSpPr/>
           <p:nvPr/>
         </p:nvSpPr>
@@ -9594,7 +9852,7 @@
       </p:sp>
       <p:sp>
         <p:nvSpPr>
-          <p:cNvPr id="11" name="TextBox 10"/>
+          <p:cNvPr id="12" name="TextBox 11"/>
           <p:cNvSpPr txBox="1"/>
           <p:nvPr/>
         </p:nvSpPr>
@@ -9636,7 +9894,7 @@
       </p:sp>
       <p:sp>
         <p:nvSpPr>
-          <p:cNvPr id="12" name="Rectangle 11"/>
+          <p:cNvPr id="13" name="Rectangle 12"/>
           <p:cNvSpPr/>
           <p:nvPr/>
         </p:nvSpPr>
@@ -9681,7 +9939,7 @@
       </p:sp>
       <p:sp>
         <p:nvSpPr>
-          <p:cNvPr id="13" name="TextBox 12"/>
+          <p:cNvPr id="14" name="TextBox 13"/>
           <p:cNvSpPr txBox="1"/>
           <p:nvPr/>
         </p:nvSpPr>
@@ -9723,7 +9981,7 @@
       </p:sp>
       <p:sp>
         <p:nvSpPr>
-          <p:cNvPr id="14" name="Rectangle 13"/>
+          <p:cNvPr id="15" name="Rectangle 14"/>
           <p:cNvSpPr/>
           <p:nvPr/>
         </p:nvSpPr>
@@ -9768,7 +10026,7 @@
       </p:sp>
       <p:sp>
         <p:nvSpPr>
-          <p:cNvPr id="15" name="TextBox 14"/>
+          <p:cNvPr id="16" name="TextBox 15"/>
           <p:cNvSpPr txBox="1"/>
           <p:nvPr/>
         </p:nvSpPr>
@@ -9808,41 +10066,6 @@
           </a:p>
         </p:txBody>
       </p:sp>
-      <p:cxnSp>
-        <p:nvCxnSpPr>
-          <p:cNvPr id="16" name="Connector 15"/>
-          <p:cNvCxnSpPr/>
-          <p:nvPr/>
-        </p:nvCxnSpPr>
-        <p:spPr>
-          <a:xfrm>
-            <a:off x="7388352" y="4114800"/>
-            <a:ext cx="0" cy="384048"/>
-          </a:xfrm>
-          <a:prstGeom prst="line">
-            <a:avLst/>
-          </a:prstGeom>
-          <a:ln w="12700">
-            <a:solidFill>
-              <a:srgbClr val="8A6F91"/>
-            </a:solidFill>
-          </a:ln>
-        </p:spPr>
-        <p:style>
-          <a:lnRef idx="2">
-            <a:schemeClr val="accent1"/>
-          </a:lnRef>
-          <a:fillRef idx="0">
-            <a:schemeClr val="accent1"/>
-          </a:fillRef>
-          <a:effectRef idx="1">
-            <a:schemeClr val="accent1"/>
-          </a:effectRef>
-          <a:fontRef idx="minor">
-            <a:schemeClr val="tx1"/>
-          </a:fontRef>
-        </p:style>
-      </p:cxnSp>
       <p:cxnSp>
         <p:nvCxnSpPr>
           <p:cNvPr id="17" name="Connector 16"/>
@@ -9851,7 +10074,7 @@
         </p:nvCxnSpPr>
         <p:spPr>
           <a:xfrm>
-            <a:off x="8823960" y="4114800"/>
+            <a:off x="7388352" y="4114800"/>
             <a:ext cx="0" cy="384048"/>
           </a:xfrm>
           <a:prstGeom prst="line">
@@ -9886,7 +10109,7 @@
         </p:nvCxnSpPr>
         <p:spPr>
           <a:xfrm>
-            <a:off x="10259568" y="4114800"/>
+            <a:off x="8823960" y="4114800"/>
             <a:ext cx="0" cy="384048"/>
           </a:xfrm>
           <a:prstGeom prst="line">
@@ -9921,8 +10144,8 @@
         </p:nvCxnSpPr>
         <p:spPr>
           <a:xfrm>
-            <a:off x="7388352" y="4498848"/>
-            <a:ext cx="2871216" cy="0"/>
+            <a:off x="10259568" y="4114800"/>
+            <a:ext cx="0" cy="384048"/>
           </a:xfrm>
           <a:prstGeom prst="line">
             <a:avLst/>
@@ -9948,9 +10171,44 @@
           </a:fontRef>
         </p:style>
       </p:cxnSp>
-      <p:sp>
-        <p:nvSpPr>
-          <p:cNvPr id="20" name="Rectangle 19"/>
+      <p:cxnSp>
+        <p:nvCxnSpPr>
+          <p:cNvPr id="20" name="Connector 19"/>
+          <p:cNvCxnSpPr/>
+          <p:nvPr/>
+        </p:nvCxnSpPr>
+        <p:spPr>
+          <a:xfrm>
+            <a:off x="7388352" y="4498848"/>
+            <a:ext cx="2871216" cy="0"/>
+          </a:xfrm>
+          <a:prstGeom prst="line">
+            <a:avLst/>
+          </a:prstGeom>
+          <a:ln w="12700">
+            <a:solidFill>
+              <a:srgbClr val="8A6F91"/>
+            </a:solidFill>
+          </a:ln>
+        </p:spPr>
+        <p:style>
+          <a:lnRef idx="2">
+            <a:schemeClr val="accent1"/>
+          </a:lnRef>
+          <a:fillRef idx="0">
+            <a:schemeClr val="accent1"/>
+          </a:fillRef>
+          <a:effectRef idx="1">
+            <a:schemeClr val="accent1"/>
+          </a:effectRef>
+          <a:fontRef idx="minor">
+            <a:schemeClr val="tx1"/>
+          </a:fontRef>
+        </p:style>
+      </p:cxnSp>
+      <p:sp>
+        <p:nvSpPr>
+          <p:cNvPr id="21" name="Rectangle 20"/>
           <p:cNvSpPr/>
           <p:nvPr/>
         </p:nvSpPr>
@@ -9993,7 +10251,7 @@
       </p:sp>
       <p:sp>
         <p:nvSpPr>
-          <p:cNvPr id="21" name="TextBox 20"/>
+          <p:cNvPr id="22" name="TextBox 21"/>
           <p:cNvSpPr txBox="1"/>
           <p:nvPr/>
         </p:nvSpPr>
@@ -10035,7 +10293,7 @@
       </p:sp>
       <p:sp>
         <p:nvSpPr>
-          <p:cNvPr id="22" name="TextBox 21"/>
+          <p:cNvPr id="23" name="TextBox 22"/>
           <p:cNvSpPr txBox="1"/>
           <p:nvPr/>
         </p:nvSpPr>
@@ -10077,7 +10335,7 @@
       </p:sp>
       <p:cxnSp>
         <p:nvCxnSpPr>
-          <p:cNvPr id="23" name="Connector 22"/>
+          <p:cNvPr id="24" name="Connector 23"/>
           <p:cNvCxnSpPr/>
           <p:nvPr/>
         </p:nvCxnSpPr>
@@ -10112,7 +10370,7 @@
       </p:cxnSp>
       <p:sp>
         <p:nvSpPr>
-          <p:cNvPr id="24" name="TextBox 23"/>
+          <p:cNvPr id="25" name="TextBox 24"/>
           <p:cNvSpPr txBox="1"/>
           <p:nvPr/>
         </p:nvSpPr>
@@ -10154,7 +10412,7 @@
       </p:sp>
       <p:sp>
         <p:nvSpPr>
-          <p:cNvPr id="25" name="TextBox 24"/>
+          <p:cNvPr id="26" name="TextBox 25"/>
           <p:cNvSpPr txBox="1"/>
           <p:nvPr/>
         </p:nvSpPr>
@@ -10189,7 +10447,7 @@
                 </a:solidFill>
                 <a:latin typeface="Aptos"/>
               </a:rPr>
-              <a:t>07 / 08</a:t>
+              <a:t>7 / 8</a:t>
             </a:r>
           </a:p>
         </p:txBody>
@@ -10299,7 +10557,7 @@
                 </a:solidFill>
                 <a:latin typeface="Aptos Display"/>
               </a:rPr>
-              <a:t>Get in touch.</a:t>
+              <a:t>Get in touch</a:t>
             </a:r>
           </a:p>
         </p:txBody>
@@ -10877,7 +11135,7 @@
                 </a:solidFill>
                 <a:latin typeface="Aptos"/>
               </a:rPr>
-              <a:t>08 / 08</a:t>
+              <a:t>8 / 8</a:t>
             </a:r>
           </a:p>
         </p:txBody>

--- a/public/decks/iyinoluwa-don-taiwo-projects.pptx
+++ b/public/decks/iyinoluwa-don-taiwo-projects.pptx
@@ -13,6 +13,8 @@
     <p:sldId id="261" r:id="rId12"/>
     <p:sldId id="262" r:id="rId13"/>
     <p:sldId id="263" r:id="rId14"/>
+    <p:sldId id="264" r:id="rId15"/>
+    <p:sldId id="265" r:id="rId16"/>
   </p:sldIdLst>
   <p:sldSz cx="12191695" cy="6858000" type="screen4x3"/>
   <p:notesSz cx="6858000" cy="9144000"/>
@@ -3091,7 +3093,7 @@
     <p:bg>
       <p:bgPr>
         <a:solidFill>
-          <a:srgbClr val="1D1E2A"/>
+          <a:srgbClr val="101114"/>
         </a:solidFill>
         <a:effectLst/>
       </p:bgPr>
@@ -3249,7 +3251,7 @@
           <a:noFill/>
           <a:ln w="19050">
             <a:solidFill>
-              <a:srgbClr val="C9EF68"/>
+              <a:srgbClr val="78E5D0"/>
             </a:solidFill>
           </a:ln>
         </p:spPr>
@@ -3290,7 +3292,7 @@
             <a:avLst/>
           </a:prstGeom>
           <a:solidFill>
-            <a:srgbClr val="5A48EF"/>
+            <a:srgbClr val="FF765D"/>
           </a:solidFill>
           <a:ln>
             <a:noFill/>
@@ -3333,7 +3335,7 @@
             <a:avLst/>
           </a:prstGeom>
           <a:solidFill>
-            <a:srgbClr val="C9EF68"/>
+            <a:srgbClr val="78E5D0"/>
           </a:solidFill>
           <a:ln>
             <a:noFill/>
@@ -3437,7 +3439,7 @@
             <a:r>
               <a:rPr sz="1000" b="1" i="0">
                 <a:solidFill>
-                  <a:srgbClr val="C9EF68"/>
+                  <a:srgbClr val="78E5D0"/>
                 </a:solidFill>
                 <a:latin typeface="Aptos"/>
               </a:rPr>
@@ -3479,9 +3481,9 @@
             <a:r>
               <a:rPr sz="3600" b="1" i="0">
                 <a:solidFill>
-                  <a:srgbClr val="F5F3ED"/>
-                </a:solidFill>
-                <a:latin typeface="Aptos Display"/>
+                  <a:srgbClr val="F1EEE7"/>
+                </a:solidFill>
+                <a:latin typeface="Georgia"/>
               </a:rPr>
               <a:t>Iyinoluwa</a:t>
             </a:r>
@@ -3498,9 +3500,9 @@
             <a:r>
               <a:rPr sz="3600" b="1" i="0">
                 <a:solidFill>
-                  <a:srgbClr val="F5F3ED"/>
-                </a:solidFill>
-                <a:latin typeface="Aptos Display"/>
+                  <a:srgbClr val="F1EEE7"/>
+                </a:solidFill>
+                <a:latin typeface="Georgia"/>
               </a:rPr>
               <a:t>Don-Taiwo</a:t>
             </a:r>
@@ -3725,6 +3727,694 @@
                 <a:latin typeface="Aptos"/>
               </a:rPr>
               <a:t>MACHINE LEARNING     DATA SCIENCE</a:t>
+            </a:r>
+          </a:p>
+        </p:txBody>
+      </p:sp>
+    </p:spTree>
+  </p:cSld>
+  <p:clrMapOvr>
+    <a:masterClrMapping/>
+  </p:clrMapOvr>
+</p:sld>
+</file>
+
+<file path=ppt/slides/slide10.xml><?xml version="1.0" encoding="utf-8"?>
+<p:sld xmlns:a="http://schemas.openxmlformats.org/drawingml/2006/main" xmlns:p="http://schemas.openxmlformats.org/presentationml/2006/main" xmlns:r="http://schemas.openxmlformats.org/officeDocument/2006/relationships">
+  <p:cSld>
+    <p:bg>
+      <p:bgPr>
+        <a:solidFill>
+          <a:srgbClr val="101114"/>
+        </a:solidFill>
+        <a:effectLst/>
+      </p:bgPr>
+    </p:bg>
+    <p:spTree>
+      <p:nvGrpSpPr>
+        <p:cNvPr id="1" name=""/>
+        <p:cNvGrpSpPr/>
+        <p:nvPr/>
+      </p:nvGrpSpPr>
+      <p:grpSpPr/>
+      <p:sp>
+        <p:nvSpPr>
+          <p:cNvPr id="2" name="TextBox 1"/>
+          <p:cNvSpPr txBox="1"/>
+          <p:nvPr/>
+        </p:nvSpPr>
+        <p:spPr>
+          <a:xfrm>
+            <a:off x="621792" y="621792"/>
+            <a:ext cx="2926080" cy="228600"/>
+          </a:xfrm>
+          <a:prstGeom prst="rect">
+            <a:avLst/>
+          </a:prstGeom>
+          <a:noFill/>
+        </p:spPr>
+        <p:txBody>
+          <a:bodyPr wrap="square" lIns="0" rIns="0" tIns="0" bIns="0" anchor="t">
+            <a:spAutoFit/>
+          </a:bodyPr>
+          <a:lstStyle/>
+          <a:p>
+            <a:pPr algn="l">
+              <a:spcBef>
+                <a:spcPts val="0"/>
+              </a:spcBef>
+              <a:spcAft>
+                <a:spcPts val="0"/>
+              </a:spcAft>
+            </a:pPr>
+            <a:r>
+              <a:rPr sz="1000" b="1" i="0">
+                <a:solidFill>
+                  <a:srgbClr val="78E5D0"/>
+                </a:solidFill>
+                <a:latin typeface="Aptos"/>
+              </a:rPr>
+              <a:t>THANK YOU</a:t>
+            </a:r>
+          </a:p>
+        </p:txBody>
+      </p:sp>
+      <p:sp>
+        <p:nvSpPr>
+          <p:cNvPr id="3" name="TextBox 2"/>
+          <p:cNvSpPr txBox="1"/>
+          <p:nvPr/>
+        </p:nvSpPr>
+        <p:spPr>
+          <a:xfrm>
+            <a:off x="621792" y="1417320"/>
+            <a:ext cx="6858000" cy="960120"/>
+          </a:xfrm>
+          <a:prstGeom prst="rect">
+            <a:avLst/>
+          </a:prstGeom>
+          <a:noFill/>
+        </p:spPr>
+        <p:txBody>
+          <a:bodyPr wrap="square" lIns="0" rIns="0" tIns="0" bIns="0" anchor="t">
+            <a:spAutoFit/>
+          </a:bodyPr>
+          <a:lstStyle/>
+          <a:p>
+            <a:pPr algn="l">
+              <a:spcBef>
+                <a:spcPts val="0"/>
+              </a:spcBef>
+              <a:spcAft>
+                <a:spcPts val="0"/>
+              </a:spcAft>
+            </a:pPr>
+            <a:r>
+              <a:rPr sz="3600" b="1" i="0">
+                <a:solidFill>
+                  <a:srgbClr val="F1EEE7"/>
+                </a:solidFill>
+                <a:latin typeface="Georgia"/>
+              </a:rPr>
+              <a:t>Get in touch</a:t>
+            </a:r>
+          </a:p>
+        </p:txBody>
+      </p:sp>
+      <p:sp>
+        <p:nvSpPr>
+          <p:cNvPr id="4" name="TextBox 3"/>
+          <p:cNvSpPr txBox="1"/>
+          <p:nvPr/>
+        </p:nvSpPr>
+        <p:spPr>
+          <a:xfrm>
+            <a:off x="658368" y="3703320"/>
+            <a:ext cx="5120640" cy="411480"/>
+          </a:xfrm>
+          <a:prstGeom prst="rect">
+            <a:avLst/>
+          </a:prstGeom>
+          <a:noFill/>
+        </p:spPr>
+        <p:txBody>
+          <a:bodyPr wrap="square" lIns="0" rIns="0" tIns="0" bIns="0" anchor="t">
+            <a:spAutoFit/>
+          </a:bodyPr>
+          <a:lstStyle/>
+          <a:p>
+            <a:pPr algn="l">
+              <a:spcBef>
+                <a:spcPts val="0"/>
+              </a:spcBef>
+              <a:spcAft>
+                <a:spcPts val="0"/>
+              </a:spcAft>
+            </a:pPr>
+            <a:r>
+              <a:rPr sz="2000" b="1" i="0">
+                <a:solidFill>
+                  <a:srgbClr val="F1EEE7"/>
+                </a:solidFill>
+                <a:latin typeface="Georgia"/>
+              </a:rPr>
+              <a:t>Iyinoluwa Don-Taiwo</a:t>
+            </a:r>
+          </a:p>
+        </p:txBody>
+      </p:sp>
+      <p:sp>
+        <p:nvSpPr>
+          <p:cNvPr id="5" name="TextBox 4"/>
+          <p:cNvSpPr txBox="1"/>
+          <p:nvPr/>
+        </p:nvSpPr>
+        <p:spPr>
+          <a:xfrm>
+            <a:off x="658368" y="4187952"/>
+            <a:ext cx="4846320" cy="274320"/>
+          </a:xfrm>
+          <a:prstGeom prst="rect">
+            <a:avLst/>
+          </a:prstGeom>
+          <a:noFill/>
+        </p:spPr>
+        <p:txBody>
+          <a:bodyPr wrap="square" lIns="0" rIns="0" tIns="0" bIns="0" anchor="t">
+            <a:spAutoFit/>
+          </a:bodyPr>
+          <a:lstStyle/>
+          <a:p>
+            <a:pPr algn="l">
+              <a:spcBef>
+                <a:spcPts val="0"/>
+              </a:spcBef>
+              <a:spcAft>
+                <a:spcPts val="0"/>
+              </a:spcAft>
+            </a:pPr>
+            <a:r>
+              <a:rPr sz="1200" b="0" i="0">
+                <a:solidFill>
+                  <a:srgbClr val="C6C7CE"/>
+                </a:solidFill>
+                <a:latin typeface="Aptos"/>
+              </a:rPr>
+              <a:t>Machine learning engineer and data scientist</a:t>
+            </a:r>
+          </a:p>
+        </p:txBody>
+      </p:sp>
+      <p:cxnSp>
+        <p:nvCxnSpPr>
+          <p:cNvPr id="6" name="Connector 5"/>
+          <p:cNvCxnSpPr/>
+          <p:nvPr/>
+        </p:nvCxnSpPr>
+        <p:spPr>
+          <a:xfrm>
+            <a:off x="658368" y="4846320"/>
+            <a:ext cx="5559552" cy="0"/>
+          </a:xfrm>
+          <a:prstGeom prst="line">
+            <a:avLst/>
+          </a:prstGeom>
+          <a:ln w="10160">
+            <a:solidFill>
+              <a:srgbClr val="50515C"/>
+            </a:solidFill>
+          </a:ln>
+        </p:spPr>
+        <p:style>
+          <a:lnRef idx="2">
+            <a:schemeClr val="accent1"/>
+          </a:lnRef>
+          <a:fillRef idx="0">
+            <a:schemeClr val="accent1"/>
+          </a:fillRef>
+          <a:effectRef idx="1">
+            <a:schemeClr val="accent1"/>
+          </a:effectRef>
+          <a:fontRef idx="minor">
+            <a:schemeClr val="tx1"/>
+          </a:fontRef>
+        </p:style>
+      </p:cxnSp>
+      <p:sp>
+        <p:nvSpPr>
+          <p:cNvPr id="7" name="TextBox 6"/>
+          <p:cNvSpPr txBox="1"/>
+          <p:nvPr/>
+        </p:nvSpPr>
+        <p:spPr>
+          <a:xfrm>
+            <a:off x="658368" y="5138928"/>
+            <a:ext cx="4937760" cy="274320"/>
+          </a:xfrm>
+          <a:prstGeom prst="rect">
+            <a:avLst/>
+          </a:prstGeom>
+          <a:noFill/>
+        </p:spPr>
+        <p:txBody>
+          <a:bodyPr wrap="square" lIns="0" rIns="0" tIns="0" bIns="0" anchor="t">
+            <a:spAutoFit/>
+          </a:bodyPr>
+          <a:lstStyle/>
+          <a:p>
+            <a:pPr algn="l">
+              <a:spcBef>
+                <a:spcPts val="0"/>
+              </a:spcBef>
+              <a:spcAft>
+                <a:spcPts val="0"/>
+              </a:spcAft>
+            </a:pPr>
+            <a:r>
+              <a:rPr sz="1300" b="0" i="0">
+                <a:solidFill>
+                  <a:srgbClr val="78E5D0"/>
+                </a:solidFill>
+                <a:latin typeface="Aptos"/>
+              </a:rPr>
+              <a:t>iyinoluwadontaiwo@gmail.com</a:t>
+            </a:r>
+          </a:p>
+        </p:txBody>
+      </p:sp>
+      <p:sp>
+        <p:nvSpPr>
+          <p:cNvPr id="8" name="TextBox 7"/>
+          <p:cNvSpPr txBox="1"/>
+          <p:nvPr/>
+        </p:nvSpPr>
+        <p:spPr>
+          <a:xfrm>
+            <a:off x="658368" y="5577840"/>
+            <a:ext cx="4297680" cy="228600"/>
+          </a:xfrm>
+          <a:prstGeom prst="rect">
+            <a:avLst/>
+          </a:prstGeom>
+          <a:noFill/>
+        </p:spPr>
+        <p:txBody>
+          <a:bodyPr wrap="square" lIns="0" rIns="0" tIns="0" bIns="0" anchor="t">
+            <a:spAutoFit/>
+          </a:bodyPr>
+          <a:lstStyle/>
+          <a:p>
+            <a:pPr algn="l">
+              <a:spcBef>
+                <a:spcPts val="0"/>
+              </a:spcBef>
+              <a:spcAft>
+                <a:spcPts val="0"/>
+              </a:spcAft>
+            </a:pPr>
+            <a:r>
+              <a:rPr sz="1100" b="0" i="0">
+                <a:solidFill>
+                  <a:srgbClr val="D5D5DA"/>
+                </a:solidFill>
+                <a:latin typeface="Aptos"/>
+              </a:rPr>
+              <a:t>github.com/IyinoluwaDon</a:t>
+            </a:r>
+          </a:p>
+        </p:txBody>
+      </p:sp>
+      <p:sp>
+        <p:nvSpPr>
+          <p:cNvPr id="9" name="Rectangle 8"/>
+          <p:cNvSpPr/>
+          <p:nvPr/>
+        </p:nvSpPr>
+        <p:spPr>
+          <a:xfrm>
+            <a:off x="7818120" y="1051560"/>
+            <a:ext cx="3401568" cy="4526280"/>
+          </a:xfrm>
+          <a:prstGeom prst="rect">
+            <a:avLst/>
+          </a:prstGeom>
+          <a:solidFill>
+            <a:srgbClr val="282936"/>
+          </a:solidFill>
+          <a:ln>
+            <a:noFill/>
+          </a:ln>
+        </p:spPr>
+        <p:style>
+          <a:lnRef idx="1">
+            <a:schemeClr val="accent1"/>
+          </a:lnRef>
+          <a:fillRef idx="3">
+            <a:schemeClr val="accent1"/>
+          </a:fillRef>
+          <a:effectRef idx="2">
+            <a:schemeClr val="accent1"/>
+          </a:effectRef>
+          <a:fontRef idx="minor">
+            <a:schemeClr val="lt1"/>
+          </a:fontRef>
+        </p:style>
+        <p:txBody>
+          <a:bodyPr rtlCol="0" anchor="ctr"/>
+          <a:lstStyle/>
+          <a:p>
+            <a:pPr algn="ctr"/>
+          </a:p>
+        </p:txBody>
+      </p:sp>
+      <p:sp>
+        <p:nvSpPr>
+          <p:cNvPr id="10" name="Oval 9"/>
+          <p:cNvSpPr/>
+          <p:nvPr/>
+        </p:nvSpPr>
+        <p:spPr>
+          <a:xfrm>
+            <a:off x="8339327" y="2788920"/>
+            <a:ext cx="493776" cy="493776"/>
+          </a:xfrm>
+          <a:prstGeom prst="ellipse">
+            <a:avLst/>
+          </a:prstGeom>
+          <a:solidFill>
+            <a:srgbClr val="FF765D"/>
+          </a:solidFill>
+          <a:ln>
+            <a:noFill/>
+          </a:ln>
+        </p:spPr>
+        <p:style>
+          <a:lnRef idx="1">
+            <a:schemeClr val="accent1"/>
+          </a:lnRef>
+          <a:fillRef idx="3">
+            <a:schemeClr val="accent1"/>
+          </a:fillRef>
+          <a:effectRef idx="2">
+            <a:schemeClr val="accent1"/>
+          </a:effectRef>
+          <a:fontRef idx="minor">
+            <a:schemeClr val="lt1"/>
+          </a:fontRef>
+        </p:style>
+        <p:txBody>
+          <a:bodyPr rtlCol="0" anchor="ctr"/>
+          <a:lstStyle/>
+          <a:p>
+            <a:pPr algn="ctr"/>
+          </a:p>
+        </p:txBody>
+      </p:sp>
+      <p:sp>
+        <p:nvSpPr>
+          <p:cNvPr id="11" name="Oval 10"/>
+          <p:cNvSpPr/>
+          <p:nvPr/>
+        </p:nvSpPr>
+        <p:spPr>
+          <a:xfrm>
+            <a:off x="9125711" y="3200400"/>
+            <a:ext cx="493776" cy="493776"/>
+          </a:xfrm>
+          <a:prstGeom prst="ellipse">
+            <a:avLst/>
+          </a:prstGeom>
+          <a:solidFill>
+            <a:srgbClr val="78E5D0"/>
+          </a:solidFill>
+          <a:ln>
+            <a:noFill/>
+          </a:ln>
+        </p:spPr>
+        <p:style>
+          <a:lnRef idx="1">
+            <a:schemeClr val="accent1"/>
+          </a:lnRef>
+          <a:fillRef idx="3">
+            <a:schemeClr val="accent1"/>
+          </a:fillRef>
+          <a:effectRef idx="2">
+            <a:schemeClr val="accent1"/>
+          </a:effectRef>
+          <a:fontRef idx="minor">
+            <a:schemeClr val="lt1"/>
+          </a:fontRef>
+        </p:style>
+        <p:txBody>
+          <a:bodyPr rtlCol="0" anchor="ctr"/>
+          <a:lstStyle/>
+          <a:p>
+            <a:pPr algn="ctr"/>
+          </a:p>
+        </p:txBody>
+      </p:sp>
+      <p:sp>
+        <p:nvSpPr>
+          <p:cNvPr id="12" name="Oval 11"/>
+          <p:cNvSpPr/>
+          <p:nvPr/>
+        </p:nvSpPr>
+        <p:spPr>
+          <a:xfrm>
+            <a:off x="9912096" y="2788920"/>
+            <a:ext cx="493776" cy="493776"/>
+          </a:xfrm>
+          <a:prstGeom prst="ellipse">
+            <a:avLst/>
+          </a:prstGeom>
+          <a:solidFill>
+            <a:srgbClr val="EDEADF"/>
+          </a:solidFill>
+          <a:ln>
+            <a:noFill/>
+          </a:ln>
+        </p:spPr>
+        <p:style>
+          <a:lnRef idx="1">
+            <a:schemeClr val="accent1"/>
+          </a:lnRef>
+          <a:fillRef idx="3">
+            <a:schemeClr val="accent1"/>
+          </a:fillRef>
+          <a:effectRef idx="2">
+            <a:schemeClr val="accent1"/>
+          </a:effectRef>
+          <a:fontRef idx="minor">
+            <a:schemeClr val="lt1"/>
+          </a:fontRef>
+        </p:style>
+        <p:txBody>
+          <a:bodyPr rtlCol="0" anchor="ctr"/>
+          <a:lstStyle/>
+          <a:p>
+            <a:pPr algn="ctr"/>
+          </a:p>
+        </p:txBody>
+      </p:sp>
+      <p:sp>
+        <p:nvSpPr>
+          <p:cNvPr id="13" name="TextBox 12"/>
+          <p:cNvSpPr txBox="1"/>
+          <p:nvPr/>
+        </p:nvSpPr>
+        <p:spPr>
+          <a:xfrm>
+            <a:off x="8183879" y="4251960"/>
+            <a:ext cx="2697480" cy="685800"/>
+          </a:xfrm>
+          <a:prstGeom prst="rect">
+            <a:avLst/>
+          </a:prstGeom>
+          <a:noFill/>
+        </p:spPr>
+        <p:txBody>
+          <a:bodyPr wrap="square" lIns="0" rIns="0" tIns="0" bIns="0" anchor="t">
+            <a:spAutoFit/>
+          </a:bodyPr>
+          <a:lstStyle/>
+          <a:p>
+            <a:pPr algn="ctr">
+              <a:spcBef>
+                <a:spcPts val="0"/>
+              </a:spcBef>
+              <a:spcAft>
+                <a:spcPts val="0"/>
+              </a:spcAft>
+            </a:pPr>
+            <a:r>
+              <a:rPr sz="1200" b="0" i="0">
+                <a:solidFill>
+                  <a:srgbClr val="F1EEE7"/>
+                </a:solidFill>
+                <a:latin typeface="Aptos"/>
+              </a:rPr>
+              <a:t>Code, demos and project notes are linked from the portfolio.</a:t>
+            </a:r>
+          </a:p>
+        </p:txBody>
+      </p:sp>
+      <p:sp>
+        <p:nvSpPr>
+          <p:cNvPr id="14" name="TextBox 13"/>
+          <p:cNvSpPr txBox="1"/>
+          <p:nvPr/>
+        </p:nvSpPr>
+        <p:spPr>
+          <a:xfrm>
+            <a:off x="8183879" y="5138928"/>
+            <a:ext cx="2697480" cy="219456"/>
+          </a:xfrm>
+          <a:prstGeom prst="rect">
+            <a:avLst/>
+          </a:prstGeom>
+          <a:noFill/>
+        </p:spPr>
+        <p:txBody>
+          <a:bodyPr wrap="square" lIns="0" rIns="0" tIns="0" bIns="0" anchor="t">
+            <a:spAutoFit/>
+          </a:bodyPr>
+          <a:lstStyle/>
+          <a:p>
+            <a:pPr algn="ctr">
+              <a:spcBef>
+                <a:spcPts val="0"/>
+              </a:spcBef>
+              <a:spcAft>
+                <a:spcPts val="0"/>
+              </a:spcAft>
+            </a:pPr>
+            <a:r>
+              <a:rPr sz="900" b="0" i="0">
+                <a:solidFill>
+                  <a:srgbClr val="C6C7CE"/>
+                </a:solidFill>
+                <a:latin typeface="Aptos"/>
+              </a:rPr>
+              <a:t>iyinoluwa-don-taiwo.vercel.app</a:t>
+            </a:r>
+          </a:p>
+        </p:txBody>
+      </p:sp>
+      <p:cxnSp>
+        <p:nvCxnSpPr>
+          <p:cNvPr id="15" name="Connector 14"/>
+          <p:cNvCxnSpPr/>
+          <p:nvPr/>
+        </p:nvCxnSpPr>
+        <p:spPr>
+          <a:xfrm>
+            <a:off x="566928" y="6446520"/>
+            <a:ext cx="11064240" cy="0"/>
+          </a:xfrm>
+          <a:prstGeom prst="line">
+            <a:avLst/>
+          </a:prstGeom>
+          <a:ln w="8255">
+            <a:solidFill>
+              <a:srgbClr val="474852"/>
+            </a:solidFill>
+          </a:ln>
+        </p:spPr>
+        <p:style>
+          <a:lnRef idx="2">
+            <a:schemeClr val="accent1"/>
+          </a:lnRef>
+          <a:fillRef idx="0">
+            <a:schemeClr val="accent1"/>
+          </a:fillRef>
+          <a:effectRef idx="1">
+            <a:schemeClr val="accent1"/>
+          </a:effectRef>
+          <a:fontRef idx="minor">
+            <a:schemeClr val="tx1"/>
+          </a:fontRef>
+        </p:style>
+      </p:cxnSp>
+      <p:sp>
+        <p:nvSpPr>
+          <p:cNvPr id="16" name="TextBox 15"/>
+          <p:cNvSpPr txBox="1"/>
+          <p:nvPr/>
+        </p:nvSpPr>
+        <p:spPr>
+          <a:xfrm>
+            <a:off x="585216" y="6510528"/>
+            <a:ext cx="5486400" cy="164592"/>
+          </a:xfrm>
+          <a:prstGeom prst="rect">
+            <a:avLst/>
+          </a:prstGeom>
+          <a:noFill/>
+        </p:spPr>
+        <p:txBody>
+          <a:bodyPr wrap="square" lIns="0" rIns="0" tIns="0" bIns="0" anchor="t">
+            <a:spAutoFit/>
+          </a:bodyPr>
+          <a:lstStyle/>
+          <a:p>
+            <a:pPr algn="l">
+              <a:spcBef>
+                <a:spcPts val="0"/>
+              </a:spcBef>
+              <a:spcAft>
+                <a:spcPts val="0"/>
+              </a:spcAft>
+            </a:pPr>
+            <a:r>
+              <a:rPr sz="850" b="0" i="0">
+                <a:solidFill>
+                  <a:srgbClr val="B9BAC1"/>
+                </a:solidFill>
+                <a:latin typeface="Aptos"/>
+              </a:rPr>
+              <a:t>Selected work</a:t>
+            </a:r>
+          </a:p>
+        </p:txBody>
+      </p:sp>
+      <p:sp>
+        <p:nvSpPr>
+          <p:cNvPr id="17" name="TextBox 16"/>
+          <p:cNvSpPr txBox="1"/>
+          <p:nvPr/>
+        </p:nvSpPr>
+        <p:spPr>
+          <a:xfrm>
+            <a:off x="10835640" y="6510528"/>
+            <a:ext cx="777240" cy="164592"/>
+          </a:xfrm>
+          <a:prstGeom prst="rect">
+            <a:avLst/>
+          </a:prstGeom>
+          <a:noFill/>
+        </p:spPr>
+        <p:txBody>
+          <a:bodyPr wrap="square" lIns="0" rIns="0" tIns="0" bIns="0" anchor="t">
+            <a:spAutoFit/>
+          </a:bodyPr>
+          <a:lstStyle/>
+          <a:p>
+            <a:pPr algn="r">
+              <a:spcBef>
+                <a:spcPts val="0"/>
+              </a:spcBef>
+              <a:spcAft>
+                <a:spcPts val="0"/>
+              </a:spcAft>
+            </a:pPr>
+            <a:r>
+              <a:rPr sz="850" b="0" i="0">
+                <a:solidFill>
+                  <a:srgbClr val="B9BAC1"/>
+                </a:solidFill>
+                <a:latin typeface="Aptos"/>
+              </a:rPr>
+              <a:t>10 / 10</a:t>
             </a:r>
           </a:p>
         </p:txBody>
@@ -3743,7 +4433,7 @@
     <p:bg>
       <p:bgPr>
         <a:solidFill>
-          <a:srgbClr val="F5F3ED"/>
+          <a:srgbClr val="F1EEE7"/>
         </a:solidFill>
         <a:effectLst/>
       </p:bgPr>
@@ -3788,7 +4478,7 @@
             <a:r>
               <a:rPr sz="900" b="1" i="0">
                 <a:solidFill>
-                  <a:srgbClr val="5A48EF"/>
+                  <a:srgbClr val="FF765D"/>
                 </a:solidFill>
                 <a:latin typeface="Aptos"/>
               </a:rPr>
@@ -3830,9 +4520,9 @@
             <a:r>
               <a:rPr sz="2900" b="1" i="0">
                 <a:solidFill>
-                  <a:srgbClr val="1D1E2A"/>
-                </a:solidFill>
-                <a:latin typeface="Aptos Display"/>
+                  <a:srgbClr val="101114"/>
+                </a:solidFill>
+                <a:latin typeface="Georgia"/>
               </a:rPr>
               <a:t>Classifying an ACL tear from a full MRI volume</a:t>
             </a:r>
@@ -3855,7 +4545,7 @@
           </a:prstGeom>
           <a:ln w="10160">
             <a:solidFill>
-              <a:srgbClr val="D9D7CF"/>
+              <a:srgbClr val="37383F"/>
             </a:solidFill>
           </a:ln>
         </p:spPr>
@@ -3949,7 +4639,7 @@
             <a:r>
               <a:rPr sz="3700" b="1" i="0">
                 <a:solidFill>
-                  <a:srgbClr val="5A48EF"/>
+                  <a:srgbClr val="FF765D"/>
                 </a:solidFill>
                 <a:latin typeface="Aptos Display"/>
               </a:rPr>
@@ -3991,7 +4681,7 @@
             <a:r>
               <a:rPr sz="1100" b="1" i="0">
                 <a:solidFill>
-                  <a:srgbClr val="696A72"/>
+                  <a:srgbClr val="85858B"/>
                 </a:solidFill>
                 <a:latin typeface="Aptos"/>
               </a:rPr>
@@ -4033,7 +4723,7 @@
             <a:r>
               <a:rPr sz="1100" b="0" i="0">
                 <a:solidFill>
-                  <a:srgbClr val="1D1E2A"/>
+                  <a:srgbClr val="101114"/>
                 </a:solidFill>
                 <a:latin typeface="Aptos"/>
               </a:rPr>
@@ -4075,7 +4765,7 @@
             <a:r>
               <a:rPr sz="850" b="1" i="0" u="sng">
                 <a:solidFill>
-                  <a:srgbClr val="5A48EF"/>
+                  <a:srgbClr val="FF765D"/>
                 </a:solidFill>
                 <a:latin typeface="Aptos"/>
                 <a:hlinkClick r:id="rId2"/>
@@ -4578,7 +5268,7 @@
             <a:avLst/>
           </a:prstGeom>
           <a:solidFill>
-            <a:srgbClr val="5A48EF"/>
+            <a:srgbClr val="FF765D"/>
           </a:solidFill>
           <a:ln>
             <a:noFill/>
@@ -4639,7 +5329,7 @@
             <a:r>
               <a:rPr sz="800" b="1" i="0">
                 <a:solidFill>
-                  <a:srgbClr val="FFFEFA"/>
+                  <a:srgbClr val="F8F6F0"/>
                 </a:solidFill>
                 <a:latin typeface="Aptos"/>
               </a:rPr>
@@ -4681,7 +5371,7 @@
             <a:r>
               <a:rPr sz="880" b="0" i="0">
                 <a:solidFill>
-                  <a:srgbClr val="696A72"/>
+                  <a:srgbClr val="85858B"/>
                 </a:solidFill>
                 <a:latin typeface="Aptos"/>
               </a:rPr>
@@ -4706,7 +5396,7 @@
           </a:prstGeom>
           <a:ln w="8255">
             <a:solidFill>
-              <a:srgbClr val="D9D7CF"/>
+              <a:srgbClr val="37383F"/>
             </a:solidFill>
           </a:ln>
         </p:spPr>
@@ -4758,7 +5448,7 @@
             <a:r>
               <a:rPr sz="850" b="0" i="0">
                 <a:solidFill>
-                  <a:srgbClr val="696A72"/>
+                  <a:srgbClr val="85858B"/>
                 </a:solidFill>
                 <a:latin typeface="Aptos"/>
               </a:rPr>
@@ -4800,11 +5490,11 @@
             <a:r>
               <a:rPr sz="850" b="0" i="0">
                 <a:solidFill>
-                  <a:srgbClr val="696A72"/>
+                  <a:srgbClr val="85858B"/>
                 </a:solidFill>
                 <a:latin typeface="Aptos"/>
               </a:rPr>
-              <a:t>2 / 8</a:t>
+              <a:t>2 / 10</a:t>
             </a:r>
           </a:p>
         </p:txBody>
@@ -4823,7 +5513,7 @@
     <p:bg>
       <p:bgPr>
         <a:solidFill>
-          <a:srgbClr val="FFFEFA"/>
+          <a:srgbClr val="F8F6F0"/>
         </a:solidFill>
         <a:effectLst/>
       </p:bgPr>
@@ -4868,7 +5558,7 @@
             <a:r>
               <a:rPr sz="900" b="1" i="0">
                 <a:solidFill>
-                  <a:srgbClr val="5A48EF"/>
+                  <a:srgbClr val="FF765D"/>
                 </a:solidFill>
                 <a:latin typeface="Aptos"/>
               </a:rPr>
@@ -4910,9 +5600,9 @@
             <a:r>
               <a:rPr sz="2900" b="1" i="0">
                 <a:solidFill>
-                  <a:srgbClr val="1D1E2A"/>
-                </a:solidFill>
-                <a:latin typeface="Aptos Display"/>
+                  <a:srgbClr val="101114"/>
+                </a:solidFill>
+                <a:latin typeface="Georgia"/>
               </a:rPr>
               <a:t>Does the product photo match its description?</a:t>
             </a:r>
@@ -4935,7 +5625,7 @@
           </a:prstGeom>
           <a:ln w="10160">
             <a:solidFill>
-              <a:srgbClr val="D9D7CF"/>
+              <a:srgbClr val="37383F"/>
             </a:solidFill>
           </a:ln>
         </p:spPr>
@@ -5029,7 +5719,7 @@
             <a:r>
               <a:rPr sz="3000" b="1" i="0">
                 <a:solidFill>
-                  <a:srgbClr val="5A48EF"/>
+                  <a:srgbClr val="FF765D"/>
                 </a:solidFill>
                 <a:latin typeface="Aptos Display"/>
               </a:rPr>
@@ -5071,7 +5761,7 @@
             <a:r>
               <a:rPr sz="1000" b="0" i="0">
                 <a:solidFill>
-                  <a:srgbClr val="696A72"/>
+                  <a:srgbClr val="85858B"/>
                 </a:solidFill>
                 <a:latin typeface="Aptos"/>
               </a:rPr>
@@ -5113,7 +5803,7 @@
             <a:r>
               <a:rPr sz="3000" b="1" i="0">
                 <a:solidFill>
-                  <a:srgbClr val="1D1E2A"/>
+                  <a:srgbClr val="101114"/>
                 </a:solidFill>
                 <a:latin typeface="Aptos Display"/>
               </a:rPr>
@@ -5155,7 +5845,7 @@
             <a:r>
               <a:rPr sz="1000" b="0" i="0">
                 <a:solidFill>
-                  <a:srgbClr val="696A72"/>
+                  <a:srgbClr val="85858B"/>
                 </a:solidFill>
                 <a:latin typeface="Aptos"/>
               </a:rPr>
@@ -5197,7 +5887,7 @@
             <a:r>
               <a:rPr sz="780" b="1" i="0" u="sng">
                 <a:solidFill>
-                  <a:srgbClr val="5A48EF"/>
+                  <a:srgbClr val="FF765D"/>
                 </a:solidFill>
                 <a:latin typeface="Aptos"/>
                 <a:hlinkClick r:id="rId2"/>
@@ -5283,7 +5973,7 @@
             <a:r>
               <a:rPr sz="900" b="1" i="0">
                 <a:solidFill>
-                  <a:srgbClr val="696A72"/>
+                  <a:srgbClr val="85858B"/>
                 </a:solidFill>
                 <a:latin typeface="Aptos"/>
               </a:rPr>
@@ -5325,7 +6015,7 @@
             <a:r>
               <a:rPr sz="1100" b="0" i="0">
                 <a:solidFill>
-                  <a:srgbClr val="1D1E2A"/>
+                  <a:srgbClr val="101114"/>
                 </a:solidFill>
                 <a:latin typeface="Aptos"/>
               </a:rPr>
@@ -5453,7 +6143,7 @@
             <a:r>
               <a:rPr sz="1200" b="1" i="0">
                 <a:solidFill>
-                  <a:srgbClr val="1D1E2A"/>
+                  <a:srgbClr val="101114"/>
                 </a:solidFill>
                 <a:latin typeface="Aptos"/>
               </a:rPr>
@@ -5495,7 +6185,7 @@
             <a:r>
               <a:rPr sz="1100" b="0" i="0">
                 <a:solidFill>
-                  <a:srgbClr val="1D1E2A"/>
+                  <a:srgbClr val="101114"/>
                 </a:solidFill>
                 <a:latin typeface="Aptos"/>
               </a:rPr>
@@ -5623,7 +6313,7 @@
             <a:r>
               <a:rPr sz="1200" b="1" i="0">
                 <a:solidFill>
-                  <a:srgbClr val="1D1E2A"/>
+                  <a:srgbClr val="101114"/>
                 </a:solidFill>
                 <a:latin typeface="Aptos"/>
               </a:rPr>
@@ -5665,7 +6355,7 @@
             <a:r>
               <a:rPr sz="1100" b="1" i="0">
                 <a:solidFill>
-                  <a:srgbClr val="1D1E2A"/>
+                  <a:srgbClr val="101114"/>
                 </a:solidFill>
                 <a:latin typeface="Aptos"/>
               </a:rPr>
@@ -5732,7 +6422,7 @@
             <a:avLst/>
           </a:prstGeom>
           <a:solidFill>
-            <a:srgbClr val="5A48EF"/>
+            <a:srgbClr val="FF765D"/>
           </a:solidFill>
           <a:ln>
             <a:noFill/>
@@ -5793,7 +6483,7 @@
             <a:r>
               <a:rPr sz="1200" b="1" i="0">
                 <a:solidFill>
-                  <a:srgbClr val="1D1E2A"/>
+                  <a:srgbClr val="101114"/>
                 </a:solidFill>
                 <a:latin typeface="Aptos"/>
               </a:rPr>
@@ -5835,7 +6525,7 @@
             <a:r>
               <a:rPr sz="880" b="0" i="0">
                 <a:solidFill>
-                  <a:srgbClr val="696A72"/>
+                  <a:srgbClr val="85858B"/>
                 </a:solidFill>
                 <a:latin typeface="Aptos"/>
               </a:rPr>
@@ -5860,7 +6550,7 @@
           </a:prstGeom>
           <a:ln w="8255">
             <a:solidFill>
-              <a:srgbClr val="D9D7CF"/>
+              <a:srgbClr val="37383F"/>
             </a:solidFill>
           </a:ln>
         </p:spPr>
@@ -5912,7 +6602,7 @@
             <a:r>
               <a:rPr sz="850" b="0" i="0">
                 <a:solidFill>
-                  <a:srgbClr val="696A72"/>
+                  <a:srgbClr val="85858B"/>
                 </a:solidFill>
                 <a:latin typeface="Aptos"/>
               </a:rPr>
@@ -5954,11 +6644,11 @@
             <a:r>
               <a:rPr sz="850" b="0" i="0">
                 <a:solidFill>
-                  <a:srgbClr val="696A72"/>
+                  <a:srgbClr val="85858B"/>
                 </a:solidFill>
                 <a:latin typeface="Aptos"/>
               </a:rPr>
-              <a:t>3 / 8</a:t>
+              <a:t>3 / 10</a:t>
             </a:r>
           </a:p>
         </p:txBody>
@@ -5977,7 +6667,7 @@
     <p:bg>
       <p:bgPr>
         <a:solidFill>
-          <a:srgbClr val="2E443C"/>
+          <a:srgbClr val="20382E"/>
         </a:solidFill>
         <a:effectLst/>
       </p:bgPr>
@@ -6022,7 +6712,7 @@
             <a:r>
               <a:rPr sz="900" b="1" i="0">
                 <a:solidFill>
-                  <a:srgbClr val="C9EF68"/>
+                  <a:srgbClr val="78E5D0"/>
                 </a:solidFill>
                 <a:latin typeface="Aptos"/>
               </a:rPr>
@@ -6064,9 +6754,9 @@
             <a:r>
               <a:rPr sz="2900" b="1" i="0">
                 <a:solidFill>
-                  <a:srgbClr val="F5F3ED"/>
-                </a:solidFill>
-                <a:latin typeface="Aptos Display"/>
+                  <a:srgbClr val="F1EEE7"/>
+                </a:solidFill>
+                <a:latin typeface="Georgia"/>
               </a:rPr>
               <a:t>Seasonal inputs lowered forecast error on the holdout</a:t>
             </a:r>
@@ -6141,7 +6831,7 @@
             <a:r>
               <a:rPr sz="1400" b="0" i="0">
                 <a:solidFill>
-                  <a:srgbClr val="F5F3ED"/>
+                  <a:srgbClr val="F1EEE7"/>
                 </a:solidFill>
                 <a:latin typeface="Aptos"/>
               </a:rPr>
@@ -6183,7 +6873,7 @@
             <a:r>
               <a:rPr sz="900" b="1" i="0">
                 <a:solidFill>
-                  <a:srgbClr val="C9EF68"/>
+                  <a:srgbClr val="78E5D0"/>
                 </a:solidFill>
                 <a:latin typeface="Aptos"/>
               </a:rPr>
@@ -6267,7 +6957,7 @@
             <a:r>
               <a:rPr sz="780" b="1" i="0" u="sng">
                 <a:solidFill>
-                  <a:srgbClr val="5A48EF"/>
+                  <a:srgbClr val="FF765D"/>
                 </a:solidFill>
                 <a:latin typeface="Aptos"/>
                 <a:hlinkClick r:id="rId2"/>
@@ -6353,7 +7043,7 @@
             <a:r>
               <a:rPr sz="900" b="1" i="0">
                 <a:solidFill>
-                  <a:srgbClr val="696A72"/>
+                  <a:srgbClr val="85858B"/>
                 </a:solidFill>
                 <a:latin typeface="Aptos"/>
               </a:rPr>
@@ -6395,7 +7085,7 @@
             <a:r>
               <a:rPr sz="1100" b="1" i="0">
                 <a:solidFill>
-                  <a:srgbClr val="1D1E2A"/>
+                  <a:srgbClr val="101114"/>
                 </a:solidFill>
                 <a:latin typeface="Aptos"/>
               </a:rPr>
@@ -6437,7 +7127,7 @@
             <a:r>
               <a:rPr sz="950" b="0" i="0">
                 <a:solidFill>
-                  <a:srgbClr val="696A72"/>
+                  <a:srgbClr val="85858B"/>
                 </a:solidFill>
                 <a:latin typeface="Aptos"/>
               </a:rPr>
@@ -6565,7 +7255,7 @@
             <a:r>
               <a:rPr sz="1000" b="1" i="0">
                 <a:solidFill>
-                  <a:srgbClr val="1D1E2A"/>
+                  <a:srgbClr val="101114"/>
                 </a:solidFill>
                 <a:latin typeface="Aptos"/>
               </a:rPr>
@@ -6607,7 +7297,7 @@
             <a:r>
               <a:rPr sz="950" b="1" i="0">
                 <a:solidFill>
-                  <a:srgbClr val="1D1E2A"/>
+                  <a:srgbClr val="101114"/>
                 </a:solidFill>
                 <a:latin typeface="Aptos"/>
               </a:rPr>
@@ -6674,7 +7364,7 @@
             <a:avLst/>
           </a:prstGeom>
           <a:solidFill>
-            <a:srgbClr val="5A48EF"/>
+            <a:srgbClr val="FF765D"/>
           </a:solidFill>
           <a:ln>
             <a:noFill/>
@@ -6735,7 +7425,7 @@
             <a:r>
               <a:rPr sz="1000" b="1" i="0">
                 <a:solidFill>
-                  <a:srgbClr val="1D1E2A"/>
+                  <a:srgbClr val="101114"/>
                 </a:solidFill>
                 <a:latin typeface="Aptos"/>
               </a:rPr>
@@ -6777,7 +7467,7 @@
             <a:r>
               <a:rPr sz="1100" b="1" i="0">
                 <a:solidFill>
-                  <a:srgbClr val="1D1E2A"/>
+                  <a:srgbClr val="101114"/>
                 </a:solidFill>
                 <a:latin typeface="Aptos"/>
               </a:rPr>
@@ -6819,7 +7509,7 @@
             <a:r>
               <a:rPr sz="950" b="0" i="0">
                 <a:solidFill>
-                  <a:srgbClr val="696A72"/>
+                  <a:srgbClr val="85858B"/>
                 </a:solidFill>
                 <a:latin typeface="Aptos"/>
               </a:rPr>
@@ -6947,7 +7637,7 @@
             <a:r>
               <a:rPr sz="1000" b="1" i="0">
                 <a:solidFill>
-                  <a:srgbClr val="1D1E2A"/>
+                  <a:srgbClr val="101114"/>
                 </a:solidFill>
                 <a:latin typeface="Aptos"/>
               </a:rPr>
@@ -6989,7 +7679,7 @@
             <a:r>
               <a:rPr sz="950" b="1" i="0">
                 <a:solidFill>
-                  <a:srgbClr val="1D1E2A"/>
+                  <a:srgbClr val="101114"/>
                 </a:solidFill>
                 <a:latin typeface="Aptos"/>
               </a:rPr>
@@ -7056,7 +7746,7 @@
             <a:avLst/>
           </a:prstGeom>
           <a:solidFill>
-            <a:srgbClr val="5A48EF"/>
+            <a:srgbClr val="FF765D"/>
           </a:solidFill>
           <a:ln>
             <a:noFill/>
@@ -7117,7 +7807,7 @@
             <a:r>
               <a:rPr sz="1000" b="1" i="0">
                 <a:solidFill>
-                  <a:srgbClr val="1D1E2A"/>
+                  <a:srgbClr val="101114"/>
                 </a:solidFill>
                 <a:latin typeface="Aptos"/>
               </a:rPr>
@@ -7282,7 +7972,7 @@
                 </a:solidFill>
                 <a:latin typeface="Aptos"/>
               </a:rPr>
-              <a:t>4 / 8</a:t>
+              <a:t>4 / 10</a:t>
             </a:r>
           </a:p>
         </p:txBody>
@@ -7301,7 +7991,7 @@
     <p:bg>
       <p:bgPr>
         <a:solidFill>
-          <a:srgbClr val="F5F3ED"/>
+          <a:srgbClr val="F1EEE7"/>
         </a:solidFill>
         <a:effectLst/>
       </p:bgPr>
@@ -7346,7 +8036,7 @@
             <a:r>
               <a:rPr sz="900" b="1" i="0">
                 <a:solidFill>
-                  <a:srgbClr val="5A48EF"/>
+                  <a:srgbClr val="FF765D"/>
                 </a:solidFill>
                 <a:latin typeface="Aptos"/>
               </a:rPr>
@@ -7388,9 +8078,9 @@
             <a:r>
               <a:rPr sz="2900" b="1" i="0">
                 <a:solidFill>
-                  <a:srgbClr val="1D1E2A"/>
-                </a:solidFill>
-                <a:latin typeface="Aptos Display"/>
+                  <a:srgbClr val="101114"/>
+                </a:solidFill>
+                <a:latin typeface="Georgia"/>
               </a:rPr>
               <a:t>Fine-tuning Gemma 2 for an African folktale challenge</a:t>
             </a:r>
@@ -7413,7 +8103,7 @@
           </a:prstGeom>
           <a:ln w="10160">
             <a:solidFill>
-              <a:srgbClr val="D9D7CF"/>
+              <a:srgbClr val="37383F"/>
             </a:solidFill>
           </a:ln>
         </p:spPr>
@@ -7507,7 +8197,7 @@
             <a:r>
               <a:rPr sz="3600" b="1" i="0">
                 <a:solidFill>
-                  <a:srgbClr val="5A48EF"/>
+                  <a:srgbClr val="FF765D"/>
                 </a:solidFill>
                 <a:latin typeface="Aptos Display"/>
               </a:rPr>
@@ -7549,7 +8239,7 @@
             <a:r>
               <a:rPr sz="1100" b="0" i="0">
                 <a:solidFill>
-                  <a:srgbClr val="696A72"/>
+                  <a:srgbClr val="85858B"/>
                 </a:solidFill>
                 <a:latin typeface="Aptos"/>
               </a:rPr>
@@ -7591,7 +8281,7 @@
             <a:r>
               <a:rPr sz="1050" b="0" i="0">
                 <a:solidFill>
-                  <a:srgbClr val="1D1E2A"/>
+                  <a:srgbClr val="101114"/>
                 </a:solidFill>
                 <a:latin typeface="Aptos"/>
               </a:rPr>
@@ -7633,7 +8323,7 @@
             <a:r>
               <a:rPr sz="850" b="1" i="0" u="sng">
                 <a:solidFill>
-                  <a:srgbClr val="5A48EF"/>
+                  <a:srgbClr val="FF765D"/>
                 </a:solidFill>
                 <a:latin typeface="Aptos"/>
                 <a:hlinkClick r:id="rId2"/>
@@ -7719,7 +8409,7 @@
             <a:r>
               <a:rPr sz="900" b="1" i="0">
                 <a:solidFill>
-                  <a:srgbClr val="696A72"/>
+                  <a:srgbClr val="85858B"/>
                 </a:solidFill>
                 <a:latin typeface="Aptos"/>
               </a:rPr>
@@ -7761,7 +8451,7 @@
             <a:r>
               <a:rPr sz="1000" b="0" i="0">
                 <a:solidFill>
-                  <a:srgbClr val="1D1E2A"/>
+                  <a:srgbClr val="101114"/>
                 </a:solidFill>
                 <a:latin typeface="Aptos"/>
               </a:rPr>
@@ -7846,7 +8536,7 @@
             <a:r>
               <a:rPr sz="1100" b="1" i="0">
                 <a:solidFill>
-                  <a:srgbClr val="1D1E2A"/>
+                  <a:srgbClr val="101114"/>
                 </a:solidFill>
                 <a:latin typeface="Aptos"/>
               </a:rPr>
@@ -7888,7 +8578,7 @@
             <a:r>
               <a:rPr sz="1000" b="1" i="0">
                 <a:solidFill>
-                  <a:srgbClr val="1D1E2A"/>
+                  <a:srgbClr val="101114"/>
                 </a:solidFill>
                 <a:latin typeface="Aptos"/>
               </a:rPr>
@@ -7955,7 +8645,7 @@
             <a:avLst/>
           </a:prstGeom>
           <a:solidFill>
-            <a:srgbClr val="5A48EF"/>
+            <a:srgbClr val="FF765D"/>
           </a:solidFill>
           <a:ln>
             <a:noFill/>
@@ -8016,7 +8706,7 @@
             <a:r>
               <a:rPr sz="1100" b="1" i="0">
                 <a:solidFill>
-                  <a:srgbClr val="1D1E2A"/>
+                  <a:srgbClr val="101114"/>
                 </a:solidFill>
                 <a:latin typeface="Aptos"/>
               </a:rPr>
@@ -8058,7 +8748,7 @@
             <a:r>
               <a:rPr sz="1000" b="0" i="0">
                 <a:solidFill>
-                  <a:srgbClr val="696A72"/>
+                  <a:srgbClr val="85858B"/>
                 </a:solidFill>
                 <a:latin typeface="Aptos"/>
               </a:rPr>
@@ -8100,7 +8790,7 @@
             <a:r>
               <a:rPr sz="880" b="0" i="0">
                 <a:solidFill>
-                  <a:srgbClr val="696A72"/>
+                  <a:srgbClr val="85858B"/>
                 </a:solidFill>
                 <a:latin typeface="Aptos"/>
               </a:rPr>
@@ -8125,7 +8815,7 @@
           </a:prstGeom>
           <a:ln w="8255">
             <a:solidFill>
-              <a:srgbClr val="D9D7CF"/>
+              <a:srgbClr val="37383F"/>
             </a:solidFill>
           </a:ln>
         </p:spPr>
@@ -8177,7 +8867,7 @@
             <a:r>
               <a:rPr sz="850" b="0" i="0">
                 <a:solidFill>
-                  <a:srgbClr val="696A72"/>
+                  <a:srgbClr val="85858B"/>
                 </a:solidFill>
                 <a:latin typeface="Aptos"/>
               </a:rPr>
@@ -8219,11 +8909,11 @@
             <a:r>
               <a:rPr sz="850" b="0" i="0">
                 <a:solidFill>
-                  <a:srgbClr val="696A72"/>
+                  <a:srgbClr val="85858B"/>
                 </a:solidFill>
                 <a:latin typeface="Aptos"/>
               </a:rPr>
-              <a:t>5 / 8</a:t>
+              <a:t>5 / 10</a:t>
             </a:r>
           </a:p>
         </p:txBody>
@@ -8242,7 +8932,7 @@
     <p:bg>
       <p:bgPr>
         <a:solidFill>
-          <a:srgbClr val="FFFEFA"/>
+          <a:srgbClr val="F8F6F0"/>
         </a:solidFill>
         <a:effectLst/>
       </p:bgPr>
@@ -8287,7 +8977,7 @@
             <a:r>
               <a:rPr sz="900" b="1" i="0">
                 <a:solidFill>
-                  <a:srgbClr val="5A48EF"/>
+                  <a:srgbClr val="FF765D"/>
                 </a:solidFill>
                 <a:latin typeface="Aptos"/>
               </a:rPr>
@@ -8329,9 +9019,9 @@
             <a:r>
               <a:rPr sz="2900" b="1" i="0">
                 <a:solidFill>
-                  <a:srgbClr val="1D1E2A"/>
-                </a:solidFill>
-                <a:latin typeface="Aptos Display"/>
+                  <a:srgbClr val="101114"/>
+                </a:solidFill>
+                <a:latin typeface="Georgia"/>
               </a:rPr>
               <a:t>Mapping surface water with Sentinel-2 indices</a:t>
             </a:r>
@@ -8354,7 +9044,7 @@
           </a:prstGeom>
           <a:ln w="10160">
             <a:solidFill>
-              <a:srgbClr val="D9D7CF"/>
+              <a:srgbClr val="37383F"/>
             </a:solidFill>
           </a:ln>
         </p:spPr>
@@ -8448,7 +9138,7 @@
             <a:r>
               <a:rPr sz="1300" b="1" i="0">
                 <a:solidFill>
-                  <a:srgbClr val="5A48EF"/>
+                  <a:srgbClr val="FF765D"/>
                 </a:solidFill>
                 <a:latin typeface="Aptos"/>
               </a:rPr>
@@ -8490,7 +9180,7 @@
             <a:r>
               <a:rPr sz="1200" b="0" i="0">
                 <a:solidFill>
-                  <a:srgbClr val="1D1E2A"/>
+                  <a:srgbClr val="101114"/>
                 </a:solidFill>
                 <a:latin typeface="Aptos"/>
               </a:rPr>
@@ -8509,7 +9199,7 @@
             <a:r>
               <a:rPr sz="1200" b="0" i="0">
                 <a:solidFill>
-                  <a:srgbClr val="1D1E2A"/>
+                  <a:srgbClr val="101114"/>
                 </a:solidFill>
                 <a:latin typeface="Aptos"/>
               </a:rPr>
@@ -8528,7 +9218,7 @@
             <a:r>
               <a:rPr sz="1200" b="0" i="0">
                 <a:solidFill>
-                  <a:srgbClr val="1D1E2A"/>
+                  <a:srgbClr val="101114"/>
                 </a:solidFill>
                 <a:latin typeface="Aptos"/>
               </a:rPr>
@@ -8570,7 +9260,7 @@
             <a:r>
               <a:rPr sz="780" b="1" i="0" u="sng">
                 <a:solidFill>
-                  <a:srgbClr val="5A48EF"/>
+                  <a:srgbClr val="FF765D"/>
                 </a:solidFill>
                 <a:latin typeface="Aptos"/>
                 <a:hlinkClick r:id="rId2"/>
@@ -8656,7 +9346,7 @@
             <a:r>
               <a:rPr sz="900" b="1" i="0">
                 <a:solidFill>
-                  <a:srgbClr val="696A72"/>
+                  <a:srgbClr val="85858B"/>
                 </a:solidFill>
                 <a:latin typeface="Aptos"/>
               </a:rPr>
@@ -8680,7 +9370,7 @@
             <a:avLst/>
           </a:prstGeom>
           <a:solidFill>
-            <a:srgbClr val="FFFEFA"/>
+            <a:srgbClr val="F8F6F0"/>
           </a:solidFill>
           <a:ln w="10160">
             <a:solidFill>
@@ -8743,7 +9433,7 @@
             <a:r>
               <a:rPr sz="1000" b="1" i="0">
                 <a:solidFill>
-                  <a:srgbClr val="1D1E2A"/>
+                  <a:srgbClr val="101114"/>
                 </a:solidFill>
                 <a:latin typeface="Aptos"/>
               </a:rPr>
@@ -8785,7 +9475,7 @@
             <a:r>
               <a:rPr sz="750" b="0" i="0">
                 <a:solidFill>
-                  <a:srgbClr val="696A72"/>
+                  <a:srgbClr val="85858B"/>
                 </a:solidFill>
                 <a:latin typeface="Aptos"/>
               </a:rPr>
@@ -8809,7 +9499,7 @@
             <a:avLst/>
           </a:prstGeom>
           <a:solidFill>
-            <a:srgbClr val="FFFEFA"/>
+            <a:srgbClr val="F8F6F0"/>
           </a:solidFill>
           <a:ln w="10160">
             <a:solidFill>
@@ -8872,7 +9562,7 @@
             <a:r>
               <a:rPr sz="1000" b="1" i="0">
                 <a:solidFill>
-                  <a:srgbClr val="1D1E2A"/>
+                  <a:srgbClr val="101114"/>
                 </a:solidFill>
                 <a:latin typeface="Aptos"/>
               </a:rPr>
@@ -8914,7 +9604,7 @@
             <a:r>
               <a:rPr sz="750" b="0" i="0">
                 <a:solidFill>
-                  <a:srgbClr val="696A72"/>
+                  <a:srgbClr val="85858B"/>
                 </a:solidFill>
                 <a:latin typeface="Aptos"/>
               </a:rPr>
@@ -8938,7 +9628,7 @@
             <a:avLst/>
           </a:prstGeom>
           <a:solidFill>
-            <a:srgbClr val="FFFEFA"/>
+            <a:srgbClr val="F8F6F0"/>
           </a:solidFill>
           <a:ln w="10160">
             <a:solidFill>
@@ -9001,7 +9691,7 @@
             <a:r>
               <a:rPr sz="1000" b="1" i="0">
                 <a:solidFill>
-                  <a:srgbClr val="1D1E2A"/>
+                  <a:srgbClr val="101114"/>
                 </a:solidFill>
                 <a:latin typeface="Aptos"/>
               </a:rPr>
@@ -9043,7 +9733,7 @@
             <a:r>
               <a:rPr sz="750" b="0" i="0">
                 <a:solidFill>
-                  <a:srgbClr val="696A72"/>
+                  <a:srgbClr val="85858B"/>
                 </a:solidFill>
                 <a:latin typeface="Aptos"/>
               </a:rPr>
@@ -9068,7 +9758,7 @@
           </a:prstGeom>
           <a:ln w="19050">
             <a:solidFill>
-              <a:srgbClr val="5A48EF"/>
+              <a:srgbClr val="FF765D"/>
             </a:solidFill>
           </a:ln>
         </p:spPr>
@@ -9103,7 +9793,7 @@
           </a:prstGeom>
           <a:ln w="19050">
             <a:solidFill>
-              <a:srgbClr val="5A48EF"/>
+              <a:srgbClr val="FF765D"/>
             </a:solidFill>
           </a:ln>
         </p:spPr>
@@ -9198,7 +9888,7 @@
             <a:r>
               <a:rPr sz="850" b="0" i="0">
                 <a:solidFill>
-                  <a:srgbClr val="1D1E2A"/>
+                  <a:srgbClr val="101114"/>
                 </a:solidFill>
                 <a:latin typeface="Aptos"/>
               </a:rPr>
@@ -9240,7 +9930,7 @@
             <a:r>
               <a:rPr sz="880" b="0" i="0">
                 <a:solidFill>
-                  <a:srgbClr val="696A72"/>
+                  <a:srgbClr val="85858B"/>
                 </a:solidFill>
                 <a:latin typeface="Aptos"/>
               </a:rPr>
@@ -9265,7 +9955,7 @@
           </a:prstGeom>
           <a:ln w="8255">
             <a:solidFill>
-              <a:srgbClr val="D9D7CF"/>
+              <a:srgbClr val="37383F"/>
             </a:solidFill>
           </a:ln>
         </p:spPr>
@@ -9317,7 +10007,7 @@
             <a:r>
               <a:rPr sz="850" b="0" i="0">
                 <a:solidFill>
-                  <a:srgbClr val="696A72"/>
+                  <a:srgbClr val="85858B"/>
                 </a:solidFill>
                 <a:latin typeface="Aptos"/>
               </a:rPr>
@@ -9359,11 +10049,11 @@
             <a:r>
               <a:rPr sz="850" b="0" i="0">
                 <a:solidFill>
-                  <a:srgbClr val="696A72"/>
+                  <a:srgbClr val="85858B"/>
                 </a:solidFill>
                 <a:latin typeface="Aptos"/>
               </a:rPr>
-              <a:t>6 / 8</a:t>
+              <a:t>6 / 10</a:t>
             </a:r>
           </a:p>
         </p:txBody>
@@ -9382,7 +10072,7 @@
     <p:bg>
       <p:bgPr>
         <a:solidFill>
-          <a:srgbClr val="F5F3ED"/>
+          <a:srgbClr val="F1EEE7"/>
         </a:solidFill>
         <a:effectLst/>
       </p:bgPr>
@@ -9427,7 +10117,7 @@
             <a:r>
               <a:rPr sz="900" b="1" i="0">
                 <a:solidFill>
-                  <a:srgbClr val="5A48EF"/>
+                  <a:srgbClr val="FF765D"/>
                 </a:solidFill>
                 <a:latin typeface="Aptos"/>
               </a:rPr>
@@ -9469,9 +10159,9 @@
             <a:r>
               <a:rPr sz="2900" b="1" i="0">
                 <a:solidFill>
-                  <a:srgbClr val="1D1E2A"/>
-                </a:solidFill>
-                <a:latin typeface="Aptos Display"/>
+                  <a:srgbClr val="101114"/>
+                </a:solidFill>
+                <a:latin typeface="Georgia"/>
               </a:rPr>
               <a:t>Employee records, attendance and payroll in one PHP app</a:t>
             </a:r>
@@ -9494,7 +10184,7 @@
           </a:prstGeom>
           <a:ln w="10160">
             <a:solidFill>
-              <a:srgbClr val="D9D7CF"/>
+              <a:srgbClr val="37383F"/>
             </a:solidFill>
           </a:ln>
         </p:spPr>
@@ -9588,7 +10278,7 @@
             <a:r>
               <a:rPr sz="1300" b="1" i="0">
                 <a:solidFill>
-                  <a:srgbClr val="5A48EF"/>
+                  <a:srgbClr val="FF765D"/>
                 </a:solidFill>
                 <a:latin typeface="Aptos"/>
               </a:rPr>
@@ -9630,7 +10320,7 @@
             <a:r>
               <a:rPr sz="1150" b="0" i="0">
                 <a:solidFill>
-                  <a:srgbClr val="1D1E2A"/>
+                  <a:srgbClr val="101114"/>
                 </a:solidFill>
                 <a:latin typeface="Aptos"/>
               </a:rPr>
@@ -9649,7 +10339,7 @@
             <a:r>
               <a:rPr sz="1150" b="0" i="0">
                 <a:solidFill>
-                  <a:srgbClr val="1D1E2A"/>
+                  <a:srgbClr val="101114"/>
                 </a:solidFill>
                 <a:latin typeface="Aptos"/>
               </a:rPr>
@@ -9668,7 +10358,7 @@
             <a:r>
               <a:rPr sz="1150" b="0" i="0">
                 <a:solidFill>
-                  <a:srgbClr val="1D1E2A"/>
+                  <a:srgbClr val="101114"/>
                 </a:solidFill>
                 <a:latin typeface="Aptos"/>
               </a:rPr>
@@ -9710,7 +10400,7 @@
             <a:r>
               <a:rPr sz="850" b="1" i="0" u="sng">
                 <a:solidFill>
-                  <a:srgbClr val="5A48EF"/>
+                  <a:srgbClr val="FF765D"/>
                 </a:solidFill>
                 <a:latin typeface="Aptos"/>
                 <a:hlinkClick r:id="rId2"/>
@@ -9796,7 +10486,7 @@
             <a:r>
               <a:rPr sz="900" b="1" i="0">
                 <a:solidFill>
-                  <a:srgbClr val="696A72"/>
+                  <a:srgbClr val="85858B"/>
                 </a:solidFill>
                 <a:latin typeface="Aptos"/>
               </a:rPr>
@@ -9820,7 +10510,7 @@
             <a:avLst/>
           </a:prstGeom>
           <a:solidFill>
-            <a:srgbClr val="FFFEFA"/>
+            <a:srgbClr val="F8F6F0"/>
           </a:solidFill>
           <a:ln w="10160">
             <a:solidFill>
@@ -9883,7 +10573,7 @@
             <a:r>
               <a:rPr sz="1000" b="1" i="0">
                 <a:solidFill>
-                  <a:srgbClr val="1D1E2A"/>
+                  <a:srgbClr val="101114"/>
                 </a:solidFill>
                 <a:latin typeface="Aptos"/>
               </a:rPr>
@@ -9907,7 +10597,7 @@
             <a:avLst/>
           </a:prstGeom>
           <a:solidFill>
-            <a:srgbClr val="FFFEFA"/>
+            <a:srgbClr val="F8F6F0"/>
           </a:solidFill>
           <a:ln w="10160">
             <a:solidFill>
@@ -9970,7 +10660,7 @@
             <a:r>
               <a:rPr sz="1000" b="1" i="0">
                 <a:solidFill>
-                  <a:srgbClr val="1D1E2A"/>
+                  <a:srgbClr val="101114"/>
                 </a:solidFill>
                 <a:latin typeface="Aptos"/>
               </a:rPr>
@@ -9994,7 +10684,7 @@
             <a:avLst/>
           </a:prstGeom>
           <a:solidFill>
-            <a:srgbClr val="FFFEFA"/>
+            <a:srgbClr val="F8F6F0"/>
           </a:solidFill>
           <a:ln w="10160">
             <a:solidFill>
@@ -10057,7 +10747,7 @@
             <a:r>
               <a:rPr sz="1000" b="1" i="0">
                 <a:solidFill>
-                  <a:srgbClr val="1D1E2A"/>
+                  <a:srgbClr val="101114"/>
                 </a:solidFill>
                 <a:latin typeface="Aptos"/>
               </a:rPr>
@@ -10282,7 +10972,7 @@
             <a:r>
               <a:rPr sz="800" b="1" i="0">
                 <a:solidFill>
-                  <a:srgbClr val="1D1E2A"/>
+                  <a:srgbClr val="101114"/>
                 </a:solidFill>
                 <a:latin typeface="Aptos"/>
               </a:rPr>
@@ -10324,7 +11014,7 @@
             <a:r>
               <a:rPr sz="880" b="0" i="0">
                 <a:solidFill>
-                  <a:srgbClr val="696A72"/>
+                  <a:srgbClr val="85858B"/>
                 </a:solidFill>
                 <a:latin typeface="Aptos"/>
               </a:rPr>
@@ -10349,7 +11039,7 @@
           </a:prstGeom>
           <a:ln w="8255">
             <a:solidFill>
-              <a:srgbClr val="D9D7CF"/>
+              <a:srgbClr val="37383F"/>
             </a:solidFill>
           </a:ln>
         </p:spPr>
@@ -10401,7 +11091,7 @@
             <a:r>
               <a:rPr sz="850" b="0" i="0">
                 <a:solidFill>
-                  <a:srgbClr val="696A72"/>
+                  <a:srgbClr val="85858B"/>
                 </a:solidFill>
                 <a:latin typeface="Aptos"/>
               </a:rPr>
@@ -10443,11 +11133,11 @@
             <a:r>
               <a:rPr sz="850" b="0" i="0">
                 <a:solidFill>
-                  <a:srgbClr val="696A72"/>
+                  <a:srgbClr val="85858B"/>
                 </a:solidFill>
                 <a:latin typeface="Aptos"/>
               </a:rPr>
-              <a:t>7 / 8</a:t>
+              <a:t>7 / 10</a:t>
             </a:r>
           </a:p>
         </p:txBody>
@@ -10466,7 +11156,7 @@
     <p:bg>
       <p:bgPr>
         <a:solidFill>
-          <a:srgbClr val="1D1E2A"/>
+          <a:srgbClr val="101114"/>
         </a:solidFill>
         <a:effectLst/>
       </p:bgPr>
@@ -10486,8 +11176,8 @@
         </p:nvSpPr>
         <p:spPr>
           <a:xfrm>
-            <a:off x="621792" y="621792"/>
-            <a:ext cx="2926080" cy="228600"/>
+            <a:off x="603504" y="429768"/>
+            <a:ext cx="6217920" cy="210312"/>
           </a:xfrm>
           <a:prstGeom prst="rect">
             <a:avLst/>
@@ -10509,13 +11199,13 @@
               </a:spcAft>
             </a:pPr>
             <a:r>
-              <a:rPr sz="1000" b="1" i="0">
-                <a:solidFill>
-                  <a:srgbClr val="C9EF68"/>
+              <a:rPr sz="900" b="1" i="0">
+                <a:solidFill>
+                  <a:srgbClr val="78E5D0"/>
                 </a:solidFill>
                 <a:latin typeface="Aptos"/>
               </a:rPr>
-              <a:t>THANK YOU</a:t>
+              <a:t>08   DATA ANALYSIS</a:t>
             </a:r>
           </a:p>
         </p:txBody>
@@ -10528,8 +11218,8 @@
         </p:nvSpPr>
         <p:spPr>
           <a:xfrm>
-            <a:off x="621792" y="1417320"/>
-            <a:ext cx="6858000" cy="960120"/>
+            <a:off x="603504" y="868680"/>
+            <a:ext cx="10881360" cy="1078992"/>
           </a:xfrm>
           <a:prstGeom prst="rect">
             <a:avLst/>
@@ -10551,118 +11241,34 @@
               </a:spcAft>
             </a:pPr>
             <a:r>
-              <a:rPr sz="3600" b="1" i="0">
-                <a:solidFill>
-                  <a:srgbClr val="F5F3ED"/>
-                </a:solidFill>
-                <a:latin typeface="Aptos Display"/>
-              </a:rPr>
-              <a:t>Get in touch</a:t>
-            </a:r>
-          </a:p>
-        </p:txBody>
-      </p:sp>
-      <p:sp>
-        <p:nvSpPr>
-          <p:cNvPr id="4" name="TextBox 3"/>
-          <p:cNvSpPr txBox="1"/>
-          <p:nvPr/>
-        </p:nvSpPr>
-        <p:spPr>
-          <a:xfrm>
-            <a:off x="658368" y="3703320"/>
-            <a:ext cx="5120640" cy="411480"/>
-          </a:xfrm>
-          <a:prstGeom prst="rect">
-            <a:avLst/>
-          </a:prstGeom>
-          <a:noFill/>
-        </p:spPr>
-        <p:txBody>
-          <a:bodyPr wrap="square" lIns="0" rIns="0" tIns="0" bIns="0" anchor="t">
-            <a:spAutoFit/>
-          </a:bodyPr>
-          <a:lstStyle/>
-          <a:p>
-            <a:pPr algn="l">
-              <a:spcBef>
-                <a:spcPts val="0"/>
-              </a:spcBef>
-              <a:spcAft>
-                <a:spcPts val="0"/>
-              </a:spcAft>
-            </a:pPr>
-            <a:r>
-              <a:rPr sz="2000" b="1" i="0">
-                <a:solidFill>
-                  <a:srgbClr val="F5F3ED"/>
-                </a:solidFill>
-                <a:latin typeface="Aptos Display"/>
-              </a:rPr>
-              <a:t>Iyinoluwa Don-Taiwo</a:t>
-            </a:r>
-          </a:p>
-        </p:txBody>
-      </p:sp>
-      <p:sp>
-        <p:nvSpPr>
-          <p:cNvPr id="5" name="TextBox 4"/>
-          <p:cNvSpPr txBox="1"/>
-          <p:nvPr/>
-        </p:nvSpPr>
-        <p:spPr>
-          <a:xfrm>
-            <a:off x="658368" y="4187952"/>
-            <a:ext cx="4846320" cy="274320"/>
-          </a:xfrm>
-          <a:prstGeom prst="rect">
-            <a:avLst/>
-          </a:prstGeom>
-          <a:noFill/>
-        </p:spPr>
-        <p:txBody>
-          <a:bodyPr wrap="square" lIns="0" rIns="0" tIns="0" bIns="0" anchor="t">
-            <a:spAutoFit/>
-          </a:bodyPr>
-          <a:lstStyle/>
-          <a:p>
-            <a:pPr algn="l">
-              <a:spcBef>
-                <a:spcPts val="0"/>
-              </a:spcBef>
-              <a:spcAft>
-                <a:spcPts val="0"/>
-              </a:spcAft>
-            </a:pPr>
-            <a:r>
-              <a:rPr sz="1200" b="0" i="0">
-                <a:solidFill>
-                  <a:srgbClr val="C6C7CE"/>
-                </a:solidFill>
-                <a:latin typeface="Aptos"/>
-              </a:rPr>
-              <a:t>Machine learning engineer and data scientist</a:t>
+              <a:rPr sz="2900" b="1" i="0">
+                <a:solidFill>
+                  <a:srgbClr val="F1EEE7"/>
+                </a:solidFill>
+                <a:latin typeface="Georgia"/>
+              </a:rPr>
+              <a:t>Checking churn comparisons in an Excel workbook</a:t>
             </a:r>
           </a:p>
         </p:txBody>
       </p:sp>
       <p:cxnSp>
         <p:nvCxnSpPr>
-          <p:cNvPr id="6" name="Connector 5"/>
+          <p:cNvPr id="4" name="Connector 3"/>
           <p:cNvCxnSpPr/>
           <p:nvPr/>
         </p:nvCxnSpPr>
         <p:spPr>
           <a:xfrm>
-            <a:off x="658368" y="4846320"/>
-            <a:ext cx="5559552" cy="0"/>
+            <a:off x="603504" y="2148840"/>
+            <a:ext cx="10991088" cy="0"/>
           </a:xfrm>
           <a:prstGeom prst="line">
             <a:avLst/>
           </a:prstGeom>
           <a:ln w="10160">
             <a:solidFill>
-              <a:srgbClr val="50515C"/>
+              <a:srgbClr val="474852"/>
             </a:solidFill>
           </a:ln>
         </p:spPr>
@@ -10683,14 +11289,98 @@
       </p:cxnSp>
       <p:sp>
         <p:nvSpPr>
+          <p:cNvPr id="5" name="TextBox 4"/>
+          <p:cNvSpPr txBox="1"/>
+          <p:nvPr/>
+        </p:nvSpPr>
+        <p:spPr>
+          <a:xfrm>
+            <a:off x="621792" y="2487168"/>
+            <a:ext cx="5074920" cy="1371600"/>
+          </a:xfrm>
+          <a:prstGeom prst="rect">
+            <a:avLst/>
+          </a:prstGeom>
+          <a:noFill/>
+        </p:spPr>
+        <p:txBody>
+          <a:bodyPr wrap="square" lIns="0" rIns="0" tIns="0" bIns="0" anchor="t">
+            <a:spAutoFit/>
+          </a:bodyPr>
+          <a:lstStyle/>
+          <a:p>
+            <a:pPr algn="l">
+              <a:spcBef>
+                <a:spcPts val="0"/>
+              </a:spcBef>
+              <a:spcAft>
+                <a:spcPts val="0"/>
+              </a:spcAft>
+            </a:pPr>
+            <a:r>
+              <a:rPr sz="1400" b="0" i="0">
+                <a:solidFill>
+                  <a:srgbClr val="F1EEE7"/>
+                </a:solidFill>
+                <a:latin typeface="Aptos"/>
+              </a:rPr>
+              <a:t>The workbook summarizes 500 customer records with PivotTables and statistical tests. I preserved the input sheet and added a verifier that checks row counts, identifiers, missing values and the reported calculations.</a:t>
+            </a:r>
+          </a:p>
+        </p:txBody>
+      </p:sp>
+      <p:sp>
+        <p:nvSpPr>
+          <p:cNvPr id="6" name="TextBox 5"/>
+          <p:cNvSpPr txBox="1"/>
+          <p:nvPr/>
+        </p:nvSpPr>
+        <p:spPr>
+          <a:xfrm>
+            <a:off x="621792" y="4160520"/>
+            <a:ext cx="3474720" cy="475488"/>
+          </a:xfrm>
+          <a:prstGeom prst="rect">
+            <a:avLst/>
+          </a:prstGeom>
+          <a:noFill/>
+        </p:spPr>
+        <p:txBody>
+          <a:bodyPr wrap="square" lIns="0" rIns="0" tIns="0" bIns="0" anchor="t">
+            <a:spAutoFit/>
+          </a:bodyPr>
+          <a:lstStyle/>
+          <a:p>
+            <a:pPr algn="l">
+              <a:spcBef>
+                <a:spcPts val="0"/>
+              </a:spcBef>
+              <a:spcAft>
+                <a:spcPts val="0"/>
+              </a:spcAft>
+            </a:pPr>
+            <a:r>
+              <a:rPr sz="2400" b="1" i="0">
+                <a:solidFill>
+                  <a:srgbClr val="78E5D0"/>
+                </a:solidFill>
+                <a:latin typeface="Aptos Display"/>
+              </a:rPr>
+              <a:t>F = 0.9898</a:t>
+            </a:r>
+          </a:p>
+        </p:txBody>
+      </p:sp>
+      <p:sp>
+        <p:nvSpPr>
           <p:cNvPr id="7" name="TextBox 6"/>
           <p:cNvSpPr txBox="1"/>
           <p:nvPr/>
         </p:nvSpPr>
         <p:spPr>
           <a:xfrm>
-            <a:off x="658368" y="5138928"/>
-            <a:ext cx="4937760" cy="274320"/>
+            <a:off x="658368" y="4690872"/>
+            <a:ext cx="4297680" cy="256032"/>
           </a:xfrm>
           <a:prstGeom prst="rect">
             <a:avLst/>
@@ -10712,13 +11402,13 @@
               </a:spcAft>
             </a:pPr>
             <a:r>
-              <a:rPr sz="1300" b="0" i="0">
-                <a:solidFill>
-                  <a:srgbClr val="C9EF68"/>
+              <a:rPr sz="1000" b="0" i="0">
+                <a:solidFill>
+                  <a:srgbClr val="D5D5DA"/>
                 </a:solidFill>
                 <a:latin typeface="Aptos"/>
               </a:rPr>
-              <a:t>iyinoluwadontaiwo@gmail.com</a:t>
+              <a:t>Credit-score ANOVA   /   p = 0.3724</a:t>
             </a:r>
           </a:p>
         </p:txBody>
@@ -10731,8 +11421,8 @@
         </p:nvSpPr>
         <p:spPr>
           <a:xfrm>
-            <a:off x="658368" y="5577840"/>
-            <a:ext cx="4297680" cy="228600"/>
+            <a:off x="658368" y="5074920"/>
+            <a:ext cx="3931920" cy="256032"/>
           </a:xfrm>
           <a:prstGeom prst="rect">
             <a:avLst/>
@@ -10754,27 +11444,70 @@
               </a:spcAft>
             </a:pPr>
             <a:r>
-              <a:rPr sz="1100" b="0" i="0">
+              <a:rPr sz="1000" b="0" i="0">
                 <a:solidFill>
                   <a:srgbClr val="D5D5DA"/>
                 </a:solidFill>
                 <a:latin typeface="Aptos"/>
               </a:rPr>
-              <a:t>github.com/IyinoluwaDon</a:t>
-            </a:r>
-          </a:p>
-        </p:txBody>
-      </p:sp>
-      <p:sp>
-        <p:nvSpPr>
-          <p:cNvPr id="9" name="Rectangle 8"/>
+              <a:t>Salary t-test   /   p = 0.42</a:t>
+            </a:r>
+          </a:p>
+        </p:txBody>
+      </p:sp>
+      <p:sp>
+        <p:nvSpPr>
+          <p:cNvPr id="9" name="TextBox 8"/>
+          <p:cNvSpPr txBox="1"/>
+          <p:nvPr/>
+        </p:nvSpPr>
+        <p:spPr>
+          <a:xfrm>
+            <a:off x="658368" y="5513832"/>
+            <a:ext cx="5303520" cy="201168"/>
+          </a:xfrm>
+          <a:prstGeom prst="rect">
+            <a:avLst/>
+          </a:prstGeom>
+          <a:noFill/>
+        </p:spPr>
+        <p:txBody>
+          <a:bodyPr wrap="square" lIns="0" rIns="0" tIns="0" bIns="0" anchor="t">
+            <a:spAutoFit/>
+          </a:bodyPr>
+          <a:lstStyle/>
+          <a:p>
+            <a:pPr algn="l">
+              <a:spcBef>
+                <a:spcPts val="0"/>
+              </a:spcBef>
+              <a:spcAft>
+                <a:spcPts val="0"/>
+              </a:spcAft>
+            </a:pPr>
+            <a:r>
+              <a:rPr sz="800" b="1" i="0" u="sng">
+                <a:solidFill>
+                  <a:srgbClr val="FF765D"/>
+                </a:solidFill>
+                <a:latin typeface="Aptos"/>
+                <a:hlinkClick r:id="rId2"/>
+              </a:rPr>
+              <a:t>Repository: github.com/IyinoluwaDon/bank_churn_analysis</a:t>
+            </a:r>
+          </a:p>
+        </p:txBody>
+      </p:sp>
+      <p:sp>
+        <p:nvSpPr>
+          <p:cNvPr id="10" name="Rectangle 9"/>
           <p:cNvSpPr/>
           <p:nvPr/>
         </p:nvSpPr>
         <p:spPr>
           <a:xfrm>
-            <a:off x="7818120" y="1051560"/>
-            <a:ext cx="3401568" cy="4526280"/>
+            <a:off x="6446520" y="2542032"/>
+            <a:ext cx="5074920" cy="3154680"/>
           </a:xfrm>
           <a:prstGeom prst="rect">
             <a:avLst/>
@@ -10810,20 +11543,104 @@
       </p:sp>
       <p:sp>
         <p:nvSpPr>
-          <p:cNvPr id="10" name="Oval 9"/>
+          <p:cNvPr id="11" name="TextBox 10"/>
+          <p:cNvSpPr txBox="1"/>
+          <p:nvPr/>
+        </p:nvSpPr>
+        <p:spPr>
+          <a:xfrm>
+            <a:off x="6766560" y="3017520"/>
+            <a:ext cx="4343400" cy="219456"/>
+          </a:xfrm>
+          <a:prstGeom prst="rect">
+            <a:avLst/>
+          </a:prstGeom>
+          <a:noFill/>
+        </p:spPr>
+        <p:txBody>
+          <a:bodyPr wrap="square" lIns="0" rIns="0" tIns="0" bIns="0" anchor="t">
+            <a:spAutoFit/>
+          </a:bodyPr>
+          <a:lstStyle/>
+          <a:p>
+            <a:pPr algn="l">
+              <a:spcBef>
+                <a:spcPts val="0"/>
+              </a:spcBef>
+              <a:spcAft>
+                <a:spcPts val="0"/>
+              </a:spcAft>
+            </a:pPr>
+            <a:r>
+              <a:rPr sz="900" b="1" i="0">
+                <a:solidFill>
+                  <a:srgbClr val="D5D5DA"/>
+                </a:solidFill>
+                <a:latin typeface="Aptos"/>
+              </a:rPr>
+              <a:t>REPORTED CHURN-RATE RANGE</a:t>
+            </a:r>
+          </a:p>
+        </p:txBody>
+      </p:sp>
+      <p:sp>
+        <p:nvSpPr>
+          <p:cNvPr id="12" name="TextBox 11"/>
+          <p:cNvSpPr txBox="1"/>
+          <p:nvPr/>
+        </p:nvSpPr>
+        <p:spPr>
+          <a:xfrm>
+            <a:off x="6766560" y="3657600"/>
+            <a:ext cx="4297680" cy="640080"/>
+          </a:xfrm>
+          <a:prstGeom prst="rect">
+            <a:avLst/>
+          </a:prstGeom>
+          <a:noFill/>
+        </p:spPr>
+        <p:txBody>
+          <a:bodyPr wrap="square" lIns="0" rIns="0" tIns="0" bIns="0" anchor="t">
+            <a:spAutoFit/>
+          </a:bodyPr>
+          <a:lstStyle/>
+          <a:p>
+            <a:pPr algn="l">
+              <a:spcBef>
+                <a:spcPts val="0"/>
+              </a:spcBef>
+              <a:spcAft>
+                <a:spcPts val="0"/>
+              </a:spcAft>
+            </a:pPr>
+            <a:r>
+              <a:rPr sz="3100" b="1" i="0">
+                <a:solidFill>
+                  <a:srgbClr val="78E5D0"/>
+                </a:solidFill>
+                <a:latin typeface="Aptos Display"/>
+              </a:rPr>
+              <a:t>52.5–55.2%</a:t>
+            </a:r>
+          </a:p>
+        </p:txBody>
+      </p:sp>
+      <p:sp>
+        <p:nvSpPr>
+          <p:cNvPr id="13" name="Rectangle 12"/>
           <p:cNvSpPr/>
           <p:nvPr/>
         </p:nvSpPr>
         <p:spPr>
           <a:xfrm>
-            <a:off x="8339327" y="2788920"/>
-            <a:ext cx="493776" cy="493776"/>
-          </a:xfrm>
-          <a:prstGeom prst="ellipse">
+            <a:off x="6766560" y="4572000"/>
+            <a:ext cx="4251960" cy="274320"/>
+          </a:xfrm>
+          <a:prstGeom prst="rect">
             <a:avLst/>
           </a:prstGeom>
           <a:solidFill>
-            <a:srgbClr val="5A48EF"/>
+            <a:srgbClr val="454650"/>
           </a:solidFill>
           <a:ln>
             <a:noFill/>
@@ -10853,20 +11670,20 @@
       </p:sp>
       <p:sp>
         <p:nvSpPr>
-          <p:cNvPr id="11" name="Oval 10"/>
+          <p:cNvPr id="14" name="Rectangle 13"/>
           <p:cNvSpPr/>
           <p:nvPr/>
         </p:nvSpPr>
         <p:spPr>
           <a:xfrm>
-            <a:off x="9125711" y="3200400"/>
-            <a:ext cx="493776" cy="493776"/>
-          </a:xfrm>
-          <a:prstGeom prst="ellipse">
+            <a:off x="6766560" y="4572000"/>
+            <a:ext cx="3657600" cy="274320"/>
+          </a:xfrm>
+          <a:prstGeom prst="rect">
             <a:avLst/>
           </a:prstGeom>
           <a:solidFill>
-            <a:srgbClr val="C9EF68"/>
+            <a:srgbClr val="78E5D0"/>
           </a:solidFill>
           <a:ln>
             <a:noFill/>
@@ -10896,134 +11713,49 @@
       </p:sp>
       <p:sp>
         <p:nvSpPr>
-          <p:cNvPr id="12" name="Oval 11"/>
-          <p:cNvSpPr/>
-          <p:nvPr/>
-        </p:nvSpPr>
-        <p:spPr>
-          <a:xfrm>
-            <a:off x="9912096" y="2788920"/>
-            <a:ext cx="493776" cy="493776"/>
-          </a:xfrm>
-          <a:prstGeom prst="ellipse">
-            <a:avLst/>
-          </a:prstGeom>
-          <a:solidFill>
-            <a:srgbClr val="EDEADF"/>
-          </a:solidFill>
-          <a:ln>
-            <a:noFill/>
-          </a:ln>
-        </p:spPr>
-        <p:style>
-          <a:lnRef idx="1">
-            <a:schemeClr val="accent1"/>
-          </a:lnRef>
-          <a:fillRef idx="3">
-            <a:schemeClr val="accent1"/>
-          </a:fillRef>
-          <a:effectRef idx="2">
-            <a:schemeClr val="accent1"/>
-          </a:effectRef>
-          <a:fontRef idx="minor">
-            <a:schemeClr val="lt1"/>
-          </a:fontRef>
-        </p:style>
-        <p:txBody>
-          <a:bodyPr rtlCol="0" anchor="ctr"/>
-          <a:lstStyle/>
-          <a:p>
-            <a:pPr algn="ctr"/>
-          </a:p>
-        </p:txBody>
-      </p:sp>
-      <p:sp>
-        <p:nvSpPr>
-          <p:cNvPr id="13" name="TextBox 12"/>
-          <p:cNvSpPr txBox="1"/>
-          <p:nvPr/>
-        </p:nvSpPr>
-        <p:spPr>
-          <a:xfrm>
-            <a:off x="8183879" y="4251960"/>
-            <a:ext cx="2697480" cy="685800"/>
-          </a:xfrm>
-          <a:prstGeom prst="rect">
-            <a:avLst/>
-          </a:prstGeom>
-          <a:noFill/>
-        </p:spPr>
-        <p:txBody>
-          <a:bodyPr wrap="square" lIns="0" rIns="0" tIns="0" bIns="0" anchor="t">
-            <a:spAutoFit/>
-          </a:bodyPr>
-          <a:lstStyle/>
-          <a:p>
-            <a:pPr algn="ctr">
-              <a:spcBef>
-                <a:spcPts val="0"/>
-              </a:spcBef>
-              <a:spcAft>
-                <a:spcPts val="0"/>
-              </a:spcAft>
-            </a:pPr>
-            <a:r>
-              <a:rPr sz="1200" b="0" i="0">
-                <a:solidFill>
-                  <a:srgbClr val="F5F3ED"/>
+          <p:cNvPr id="15" name="TextBox 14"/>
+          <p:cNvSpPr txBox="1"/>
+          <p:nvPr/>
+        </p:nvSpPr>
+        <p:spPr>
+          <a:xfrm>
+            <a:off x="621792" y="6007608"/>
+            <a:ext cx="10561320" cy="219456"/>
+          </a:xfrm>
+          <a:prstGeom prst="rect">
+            <a:avLst/>
+          </a:prstGeom>
+          <a:noFill/>
+        </p:spPr>
+        <p:txBody>
+          <a:bodyPr wrap="square" lIns="0" rIns="0" tIns="0" bIns="0" anchor="t">
+            <a:spAutoFit/>
+          </a:bodyPr>
+          <a:lstStyle/>
+          <a:p>
+            <a:pPr algn="l">
+              <a:spcBef>
+                <a:spcPts val="0"/>
+              </a:spcBef>
+              <a:spcAft>
+                <a:spcPts val="0"/>
+              </a:spcAft>
+            </a:pPr>
+            <a:r>
+              <a:rPr sz="880" b="0" i="0">
+                <a:solidFill>
+                  <a:srgbClr val="B9BAC1"/>
                 </a:solidFill>
                 <a:latin typeface="Aptos"/>
               </a:rPr>
-              <a:t>Code, demos and project notes are linked from the portfolio.</a:t>
-            </a:r>
-          </a:p>
-        </p:txBody>
-      </p:sp>
-      <p:sp>
-        <p:nvSpPr>
-          <p:cNvPr id="14" name="TextBox 13"/>
-          <p:cNvSpPr txBox="1"/>
-          <p:nvPr/>
-        </p:nvSpPr>
-        <p:spPr>
-          <a:xfrm>
-            <a:off x="8183879" y="5138928"/>
-            <a:ext cx="2697480" cy="219456"/>
-          </a:xfrm>
-          <a:prstGeom prst="rect">
-            <a:avLst/>
-          </a:prstGeom>
-          <a:noFill/>
-        </p:spPr>
-        <p:txBody>
-          <a:bodyPr wrap="square" lIns="0" rIns="0" tIns="0" bIns="0" anchor="t">
-            <a:spAutoFit/>
-          </a:bodyPr>
-          <a:lstStyle/>
-          <a:p>
-            <a:pPr algn="ctr">
-              <a:spcBef>
-                <a:spcPts val="0"/>
-              </a:spcBef>
-              <a:spcAft>
-                <a:spcPts val="0"/>
-              </a:spcAft>
-            </a:pPr>
-            <a:r>
-              <a:rPr sz="900" b="0" i="0">
-                <a:solidFill>
-                  <a:srgbClr val="C6C7CE"/>
-                </a:solidFill>
-                <a:latin typeface="Aptos"/>
-              </a:rPr>
-              <a:t>iyinoluwa-don-taiwo.vercel.app</a:t>
+              <a:t>Sample source and license are undocumented. Descriptive results do not establish causes or general bank-wide churn rates.</a:t>
             </a:r>
           </a:p>
         </p:txBody>
       </p:sp>
       <p:cxnSp>
         <p:nvCxnSpPr>
-          <p:cNvPr id="15" name="Connector 14"/>
+          <p:cNvPr id="16" name="Connector 15"/>
           <p:cNvCxnSpPr/>
           <p:nvPr/>
         </p:nvCxnSpPr>
@@ -11058,7 +11790,7 @@
       </p:cxnSp>
       <p:sp>
         <p:nvSpPr>
-          <p:cNvPr id="16" name="TextBox 15"/>
+          <p:cNvPr id="17" name="TextBox 16"/>
           <p:cNvSpPr txBox="1"/>
           <p:nvPr/>
         </p:nvSpPr>
@@ -11093,14 +11825,14 @@
                 </a:solidFill>
                 <a:latin typeface="Aptos"/>
               </a:rPr>
-              <a:t>Selected work</a:t>
-            </a:r>
-          </a:p>
-        </p:txBody>
-      </p:sp>
-      <p:sp>
-        <p:nvSpPr>
-          <p:cNvPr id="17" name="TextBox 16"/>
+              <a:t>Iyinoluwa Don-Taiwo</a:t>
+            </a:r>
+          </a:p>
+        </p:txBody>
+      </p:sp>
+      <p:sp>
+        <p:nvSpPr>
+          <p:cNvPr id="18" name="TextBox 17"/>
           <p:cNvSpPr txBox="1"/>
           <p:nvPr/>
         </p:nvSpPr>
@@ -11135,7 +11867,1127 @@
                 </a:solidFill>
                 <a:latin typeface="Aptos"/>
               </a:rPr>
-              <a:t>8 / 8</a:t>
+              <a:t>8 / 10</a:t>
+            </a:r>
+          </a:p>
+        </p:txBody>
+      </p:sp>
+    </p:spTree>
+  </p:cSld>
+  <p:clrMapOvr>
+    <a:masterClrMapping/>
+  </p:clrMapOvr>
+</p:sld>
+</file>
+
+<file path=ppt/slides/slide9.xml><?xml version="1.0" encoding="utf-8"?>
+<p:sld xmlns:a="http://schemas.openxmlformats.org/drawingml/2006/main" xmlns:p="http://schemas.openxmlformats.org/presentationml/2006/main" xmlns:r="http://schemas.openxmlformats.org/officeDocument/2006/relationships">
+  <p:cSld>
+    <p:bg>
+      <p:bgPr>
+        <a:solidFill>
+          <a:srgbClr val="F1EEE7"/>
+        </a:solidFill>
+        <a:effectLst/>
+      </p:bgPr>
+    </p:bg>
+    <p:spTree>
+      <p:nvGrpSpPr>
+        <p:cNvPr id="1" name=""/>
+        <p:cNvGrpSpPr/>
+        <p:nvPr/>
+      </p:nvGrpSpPr>
+      <p:grpSpPr/>
+      <p:sp>
+        <p:nvSpPr>
+          <p:cNvPr id="2" name="TextBox 1"/>
+          <p:cNvSpPr txBox="1"/>
+          <p:nvPr/>
+        </p:nvSpPr>
+        <p:spPr>
+          <a:xfrm>
+            <a:off x="603504" y="429768"/>
+            <a:ext cx="6217920" cy="210312"/>
+          </a:xfrm>
+          <a:prstGeom prst="rect">
+            <a:avLst/>
+          </a:prstGeom>
+          <a:noFill/>
+        </p:spPr>
+        <p:txBody>
+          <a:bodyPr wrap="square" lIns="0" rIns="0" tIns="0" bIns="0" anchor="t">
+            <a:spAutoFit/>
+          </a:bodyPr>
+          <a:lstStyle/>
+          <a:p>
+            <a:pPr algn="l">
+              <a:spcBef>
+                <a:spcPts val="0"/>
+              </a:spcBef>
+              <a:spcAft>
+                <a:spcPts val="0"/>
+              </a:spcAft>
+            </a:pPr>
+            <a:r>
+              <a:rPr sz="900" b="1" i="0">
+                <a:solidFill>
+                  <a:srgbClr val="FF765D"/>
+                </a:solidFill>
+                <a:latin typeface="Aptos"/>
+              </a:rPr>
+              <a:t>09   DATA ANALYSIS</a:t>
+            </a:r>
+          </a:p>
+        </p:txBody>
+      </p:sp>
+      <p:sp>
+        <p:nvSpPr>
+          <p:cNvPr id="3" name="TextBox 2"/>
+          <p:cNvSpPr txBox="1"/>
+          <p:nvPr/>
+        </p:nvSpPr>
+        <p:spPr>
+          <a:xfrm>
+            <a:off x="603504" y="868680"/>
+            <a:ext cx="10881360" cy="1078992"/>
+          </a:xfrm>
+          <a:prstGeom prst="rect">
+            <a:avLst/>
+          </a:prstGeom>
+          <a:noFill/>
+        </p:spPr>
+        <p:txBody>
+          <a:bodyPr wrap="square" lIns="0" rIns="0" tIns="0" bIns="0" anchor="t">
+            <a:spAutoFit/>
+          </a:bodyPr>
+          <a:lstStyle/>
+          <a:p>
+            <a:pPr algn="l">
+              <a:spcBef>
+                <a:spcPts val="0"/>
+              </a:spcBef>
+              <a:spcAft>
+                <a:spcPts val="0"/>
+              </a:spcAft>
+            </a:pPr>
+            <a:r>
+              <a:rPr sz="2900" b="1" i="0">
+                <a:solidFill>
+                  <a:srgbClr val="101114"/>
+                </a:solidFill>
+                <a:latin typeface="Georgia"/>
+              </a:rPr>
+              <a:t>Twelve read-only queries over an HR database</a:t>
+            </a:r>
+          </a:p>
+        </p:txBody>
+      </p:sp>
+      <p:cxnSp>
+        <p:nvCxnSpPr>
+          <p:cNvPr id="4" name="Connector 3"/>
+          <p:cNvCxnSpPr/>
+          <p:nvPr/>
+        </p:nvCxnSpPr>
+        <p:spPr>
+          <a:xfrm>
+            <a:off x="603504" y="2148840"/>
+            <a:ext cx="10991088" cy="0"/>
+          </a:xfrm>
+          <a:prstGeom prst="line">
+            <a:avLst/>
+          </a:prstGeom>
+          <a:ln w="10160">
+            <a:solidFill>
+              <a:srgbClr val="37383F"/>
+            </a:solidFill>
+          </a:ln>
+        </p:spPr>
+        <p:style>
+          <a:lnRef idx="2">
+            <a:schemeClr val="accent1"/>
+          </a:lnRef>
+          <a:fillRef idx="0">
+            <a:schemeClr val="accent1"/>
+          </a:fillRef>
+          <a:effectRef idx="1">
+            <a:schemeClr val="accent1"/>
+          </a:effectRef>
+          <a:fontRef idx="minor">
+            <a:schemeClr val="tx1"/>
+          </a:fontRef>
+        </p:style>
+      </p:cxnSp>
+      <p:sp>
+        <p:nvSpPr>
+          <p:cNvPr id="5" name="TextBox 4"/>
+          <p:cNvSpPr txBox="1"/>
+          <p:nvPr/>
+        </p:nvSpPr>
+        <p:spPr>
+          <a:xfrm>
+            <a:off x="621792" y="2487168"/>
+            <a:ext cx="5029200" cy="1188720"/>
+          </a:xfrm>
+          <a:prstGeom prst="rect">
+            <a:avLst/>
+          </a:prstGeom>
+          <a:noFill/>
+        </p:spPr>
+        <p:txBody>
+          <a:bodyPr wrap="square" lIns="0" rIns="0" tIns="0" bIns="0" anchor="t">
+            <a:spAutoFit/>
+          </a:bodyPr>
+          <a:lstStyle/>
+          <a:p>
+            <a:pPr algn="l">
+              <a:spcBef>
+                <a:spcPts val="0"/>
+              </a:spcBef>
+              <a:spcAft>
+                <a:spcPts val="0"/>
+              </a:spcAft>
+            </a:pPr>
+            <a:r>
+              <a:rPr sz="1400" b="0" i="0">
+                <a:solidFill>
+                  <a:srgbClr val="41424A"/>
+                </a:solidFill>
+                <a:latin typeface="Aptos"/>
+              </a:rPr>
+              <a:t>A small SQLite analysis validates database integrity, calculates tenure relative to review dates, runs twelve named queries and exports the results as CSV and JSON.</a:t>
+            </a:r>
+          </a:p>
+        </p:txBody>
+      </p:sp>
+      <p:sp>
+        <p:nvSpPr>
+          <p:cNvPr id="6" name="TextBox 5"/>
+          <p:cNvSpPr txBox="1"/>
+          <p:nvPr/>
+        </p:nvSpPr>
+        <p:spPr>
+          <a:xfrm>
+            <a:off x="621792" y="3931920"/>
+            <a:ext cx="2194560" cy="566928"/>
+          </a:xfrm>
+          <a:prstGeom prst="rect">
+            <a:avLst/>
+          </a:prstGeom>
+          <a:noFill/>
+        </p:spPr>
+        <p:txBody>
+          <a:bodyPr wrap="square" lIns="0" rIns="0" tIns="0" bIns="0" anchor="t">
+            <a:spAutoFit/>
+          </a:bodyPr>
+          <a:lstStyle/>
+          <a:p>
+            <a:pPr algn="l">
+              <a:spcBef>
+                <a:spcPts val="0"/>
+              </a:spcBef>
+              <a:spcAft>
+                <a:spcPts val="0"/>
+              </a:spcAft>
+            </a:pPr>
+            <a:r>
+              <a:rPr sz="3000" b="1" i="0">
+                <a:solidFill>
+                  <a:srgbClr val="FF765D"/>
+                </a:solidFill>
+                <a:latin typeface="Aptos Display"/>
+              </a:rPr>
+              <a:t>1,000</a:t>
+            </a:r>
+          </a:p>
+        </p:txBody>
+      </p:sp>
+      <p:sp>
+        <p:nvSpPr>
+          <p:cNvPr id="7" name="TextBox 6"/>
+          <p:cNvSpPr txBox="1"/>
+          <p:nvPr/>
+        </p:nvSpPr>
+        <p:spPr>
+          <a:xfrm>
+            <a:off x="658368" y="4553712"/>
+            <a:ext cx="2286000" cy="228600"/>
+          </a:xfrm>
+          <a:prstGeom prst="rect">
+            <a:avLst/>
+          </a:prstGeom>
+          <a:noFill/>
+        </p:spPr>
+        <p:txBody>
+          <a:bodyPr wrap="square" lIns="0" rIns="0" tIns="0" bIns="0" anchor="t">
+            <a:spAutoFit/>
+          </a:bodyPr>
+          <a:lstStyle/>
+          <a:p>
+            <a:pPr algn="l">
+              <a:spcBef>
+                <a:spcPts val="0"/>
+              </a:spcBef>
+              <a:spcAft>
+                <a:spcPts val="0"/>
+              </a:spcAft>
+            </a:pPr>
+            <a:r>
+              <a:rPr sz="1000" b="0" i="0">
+                <a:solidFill>
+                  <a:srgbClr val="85858B"/>
+                </a:solidFill>
+                <a:latin typeface="Aptos"/>
+              </a:rPr>
+              <a:t>employee records</a:t>
+            </a:r>
+          </a:p>
+        </p:txBody>
+      </p:sp>
+      <p:sp>
+        <p:nvSpPr>
+          <p:cNvPr id="8" name="TextBox 7"/>
+          <p:cNvSpPr txBox="1"/>
+          <p:nvPr/>
+        </p:nvSpPr>
+        <p:spPr>
+          <a:xfrm>
+            <a:off x="3108960" y="3931920"/>
+            <a:ext cx="1463040" cy="566928"/>
+          </a:xfrm>
+          <a:prstGeom prst="rect">
+            <a:avLst/>
+          </a:prstGeom>
+          <a:noFill/>
+        </p:spPr>
+        <p:txBody>
+          <a:bodyPr wrap="square" lIns="0" rIns="0" tIns="0" bIns="0" anchor="t">
+            <a:spAutoFit/>
+          </a:bodyPr>
+          <a:lstStyle/>
+          <a:p>
+            <a:pPr algn="l">
+              <a:spcBef>
+                <a:spcPts val="0"/>
+              </a:spcBef>
+              <a:spcAft>
+                <a:spcPts val="0"/>
+              </a:spcAft>
+            </a:pPr>
+            <a:r>
+              <a:rPr sz="3000" b="1" i="0">
+                <a:solidFill>
+                  <a:srgbClr val="101114"/>
+                </a:solidFill>
+                <a:latin typeface="Aptos Display"/>
+              </a:rPr>
+              <a:t>238</a:t>
+            </a:r>
+          </a:p>
+        </p:txBody>
+      </p:sp>
+      <p:sp>
+        <p:nvSpPr>
+          <p:cNvPr id="9" name="TextBox 8"/>
+          <p:cNvSpPr txBox="1"/>
+          <p:nvPr/>
+        </p:nvSpPr>
+        <p:spPr>
+          <a:xfrm>
+            <a:off x="3145536" y="4553712"/>
+            <a:ext cx="2286000" cy="228600"/>
+          </a:xfrm>
+          <a:prstGeom prst="rect">
+            <a:avLst/>
+          </a:prstGeom>
+          <a:noFill/>
+        </p:spPr>
+        <p:txBody>
+          <a:bodyPr wrap="square" lIns="0" rIns="0" tIns="0" bIns="0" anchor="t">
+            <a:spAutoFit/>
+          </a:bodyPr>
+          <a:lstStyle/>
+          <a:p>
+            <a:pPr algn="l">
+              <a:spcBef>
+                <a:spcPts val="0"/>
+              </a:spcBef>
+              <a:spcAft>
+                <a:spcPts val="0"/>
+              </a:spcAft>
+            </a:pPr>
+            <a:r>
+              <a:rPr sz="1000" b="0" i="0">
+                <a:solidFill>
+                  <a:srgbClr val="85858B"/>
+                </a:solidFill>
+                <a:latin typeface="Aptos"/>
+              </a:rPr>
+              <a:t>Engineering employees</a:t>
+            </a:r>
+          </a:p>
+        </p:txBody>
+      </p:sp>
+      <p:sp>
+        <p:nvSpPr>
+          <p:cNvPr id="10" name="TextBox 9"/>
+          <p:cNvSpPr txBox="1"/>
+          <p:nvPr/>
+        </p:nvSpPr>
+        <p:spPr>
+          <a:xfrm>
+            <a:off x="621792" y="5230368"/>
+            <a:ext cx="5303520" cy="201168"/>
+          </a:xfrm>
+          <a:prstGeom prst="rect">
+            <a:avLst/>
+          </a:prstGeom>
+          <a:noFill/>
+        </p:spPr>
+        <p:txBody>
+          <a:bodyPr wrap="square" lIns="0" rIns="0" tIns="0" bIns="0" anchor="t">
+            <a:spAutoFit/>
+          </a:bodyPr>
+          <a:lstStyle/>
+          <a:p>
+            <a:pPr algn="l">
+              <a:spcBef>
+                <a:spcPts val="0"/>
+              </a:spcBef>
+              <a:spcAft>
+                <a:spcPts val="0"/>
+              </a:spcAft>
+            </a:pPr>
+            <a:r>
+              <a:rPr sz="800" b="1" i="0" u="sng">
+                <a:solidFill>
+                  <a:srgbClr val="FF765D"/>
+                </a:solidFill>
+                <a:latin typeface="Aptos"/>
+                <a:hlinkClick r:id="rId2"/>
+              </a:rPr>
+              <a:t>Repository: github.com/IyinoluwaDon/HR-Data-Analysis-with-SQL</a:t>
+            </a:r>
+          </a:p>
+        </p:txBody>
+      </p:sp>
+      <p:sp>
+        <p:nvSpPr>
+          <p:cNvPr id="11" name="Rectangle 10"/>
+          <p:cNvSpPr/>
+          <p:nvPr/>
+        </p:nvSpPr>
+        <p:spPr>
+          <a:xfrm>
+            <a:off x="6446520" y="2514600"/>
+            <a:ext cx="5074920" cy="3182112"/>
+          </a:xfrm>
+          <a:prstGeom prst="rect">
+            <a:avLst/>
+          </a:prstGeom>
+          <a:solidFill>
+            <a:srgbClr val="1D3033"/>
+          </a:solidFill>
+          <a:ln>
+            <a:noFill/>
+          </a:ln>
+        </p:spPr>
+        <p:style>
+          <a:lnRef idx="1">
+            <a:schemeClr val="accent1"/>
+          </a:lnRef>
+          <a:fillRef idx="3">
+            <a:schemeClr val="accent1"/>
+          </a:fillRef>
+          <a:effectRef idx="2">
+            <a:schemeClr val="accent1"/>
+          </a:effectRef>
+          <a:fontRef idx="minor">
+            <a:schemeClr val="lt1"/>
+          </a:fontRef>
+        </p:style>
+        <p:txBody>
+          <a:bodyPr rtlCol="0" anchor="ctr"/>
+          <a:lstStyle/>
+          <a:p>
+            <a:pPr algn="ctr"/>
+          </a:p>
+        </p:txBody>
+      </p:sp>
+      <p:sp>
+        <p:nvSpPr>
+          <p:cNvPr id="12" name="TextBox 11"/>
+          <p:cNvSpPr txBox="1"/>
+          <p:nvPr/>
+        </p:nvSpPr>
+        <p:spPr>
+          <a:xfrm>
+            <a:off x="6784848" y="2816352"/>
+            <a:ext cx="4206240" cy="210312"/>
+          </a:xfrm>
+          <a:prstGeom prst="rect">
+            <a:avLst/>
+          </a:prstGeom>
+          <a:noFill/>
+        </p:spPr>
+        <p:txBody>
+          <a:bodyPr wrap="square" lIns="0" rIns="0" tIns="0" bIns="0" anchor="t">
+            <a:spAutoFit/>
+          </a:bodyPr>
+          <a:lstStyle/>
+          <a:p>
+            <a:pPr algn="l">
+              <a:spcBef>
+                <a:spcPts val="0"/>
+              </a:spcBef>
+              <a:spcAft>
+                <a:spcPts val="0"/>
+              </a:spcAft>
+            </a:pPr>
+            <a:r>
+              <a:rPr sz="900" b="1" i="0">
+                <a:solidFill>
+                  <a:srgbClr val="A9F0DC"/>
+                </a:solidFill>
+                <a:latin typeface="Aptos"/>
+              </a:rPr>
+              <a:t>READ-ONLY QUERY OUTPUT</a:t>
+            </a:r>
+          </a:p>
+        </p:txBody>
+      </p:sp>
+      <p:sp>
+        <p:nvSpPr>
+          <p:cNvPr id="13" name="TextBox 12"/>
+          <p:cNvSpPr txBox="1"/>
+          <p:nvPr/>
+        </p:nvSpPr>
+        <p:spPr>
+          <a:xfrm>
+            <a:off x="6784848" y="3310128"/>
+            <a:ext cx="2011680" cy="201168"/>
+          </a:xfrm>
+          <a:prstGeom prst="rect">
+            <a:avLst/>
+          </a:prstGeom>
+          <a:noFill/>
+        </p:spPr>
+        <p:txBody>
+          <a:bodyPr wrap="square" lIns="0" rIns="0" tIns="0" bIns="0" anchor="t">
+            <a:spAutoFit/>
+          </a:bodyPr>
+          <a:lstStyle/>
+          <a:p>
+            <a:pPr algn="l">
+              <a:spcBef>
+                <a:spcPts val="0"/>
+              </a:spcBef>
+              <a:spcAft>
+                <a:spcPts val="0"/>
+              </a:spcAft>
+            </a:pPr>
+            <a:r>
+              <a:rPr sz="900" b="0" i="0">
+                <a:solidFill>
+                  <a:srgbClr val="D5D5DA"/>
+                </a:solidFill>
+                <a:latin typeface="Aptos"/>
+              </a:rPr>
+              <a:t>INTEGRITY</a:t>
+            </a:r>
+          </a:p>
+        </p:txBody>
+      </p:sp>
+      <p:sp>
+        <p:nvSpPr>
+          <p:cNvPr id="14" name="TextBox 13"/>
+          <p:cNvSpPr txBox="1"/>
+          <p:nvPr/>
+        </p:nvSpPr>
+        <p:spPr>
+          <a:xfrm>
+            <a:off x="9144000" y="3310128"/>
+            <a:ext cx="1920240" cy="201168"/>
+          </a:xfrm>
+          <a:prstGeom prst="rect">
+            <a:avLst/>
+          </a:prstGeom>
+          <a:noFill/>
+        </p:spPr>
+        <p:txBody>
+          <a:bodyPr wrap="square" lIns="0" rIns="0" tIns="0" bIns="0" anchor="t">
+            <a:spAutoFit/>
+          </a:bodyPr>
+          <a:lstStyle/>
+          <a:p>
+            <a:pPr algn="r">
+              <a:spcBef>
+                <a:spcPts val="0"/>
+              </a:spcBef>
+              <a:spcAft>
+                <a:spcPts val="0"/>
+              </a:spcAft>
+            </a:pPr>
+            <a:r>
+              <a:rPr sz="900" b="1" i="0">
+                <a:solidFill>
+                  <a:srgbClr val="F1EEE7"/>
+                </a:solidFill>
+                <a:latin typeface="Aptos"/>
+              </a:rPr>
+              <a:t>PASS</a:t>
+            </a:r>
+          </a:p>
+        </p:txBody>
+      </p:sp>
+      <p:cxnSp>
+        <p:nvCxnSpPr>
+          <p:cNvPr id="15" name="Connector 14"/>
+          <p:cNvCxnSpPr/>
+          <p:nvPr/>
+        </p:nvCxnSpPr>
+        <p:spPr>
+          <a:xfrm>
+            <a:off x="6784848" y="3602736"/>
+            <a:ext cx="4279392" cy="0"/>
+          </a:xfrm>
+          <a:prstGeom prst="line">
+            <a:avLst/>
+          </a:prstGeom>
+          <a:ln w="7620">
+            <a:solidFill>
+              <a:srgbClr val="43575A"/>
+            </a:solidFill>
+          </a:ln>
+        </p:spPr>
+        <p:style>
+          <a:lnRef idx="2">
+            <a:schemeClr val="accent1"/>
+          </a:lnRef>
+          <a:fillRef idx="0">
+            <a:schemeClr val="accent1"/>
+          </a:fillRef>
+          <a:effectRef idx="1">
+            <a:schemeClr val="accent1"/>
+          </a:effectRef>
+          <a:fontRef idx="minor">
+            <a:schemeClr val="tx1"/>
+          </a:fontRef>
+        </p:style>
+      </p:cxnSp>
+      <p:sp>
+        <p:nvSpPr>
+          <p:cNvPr id="16" name="TextBox 15"/>
+          <p:cNvSpPr txBox="1"/>
+          <p:nvPr/>
+        </p:nvSpPr>
+        <p:spPr>
+          <a:xfrm>
+            <a:off x="6784848" y="3785616"/>
+            <a:ext cx="2011680" cy="201168"/>
+          </a:xfrm>
+          <a:prstGeom prst="rect">
+            <a:avLst/>
+          </a:prstGeom>
+          <a:noFill/>
+        </p:spPr>
+        <p:txBody>
+          <a:bodyPr wrap="square" lIns="0" rIns="0" tIns="0" bIns="0" anchor="t">
+            <a:spAutoFit/>
+          </a:bodyPr>
+          <a:lstStyle/>
+          <a:p>
+            <a:pPr algn="l">
+              <a:spcBef>
+                <a:spcPts val="0"/>
+              </a:spcBef>
+              <a:spcAft>
+                <a:spcPts val="0"/>
+              </a:spcAft>
+            </a:pPr>
+            <a:r>
+              <a:rPr sz="900" b="0" i="0">
+                <a:solidFill>
+                  <a:srgbClr val="D5D5DA"/>
+                </a:solidFill>
+                <a:latin typeface="Aptos"/>
+              </a:rPr>
+              <a:t>FOREIGN KEYS</a:t>
+            </a:r>
+          </a:p>
+        </p:txBody>
+      </p:sp>
+      <p:sp>
+        <p:nvSpPr>
+          <p:cNvPr id="17" name="TextBox 16"/>
+          <p:cNvSpPr txBox="1"/>
+          <p:nvPr/>
+        </p:nvSpPr>
+        <p:spPr>
+          <a:xfrm>
+            <a:off x="9144000" y="3785616"/>
+            <a:ext cx="1920240" cy="201168"/>
+          </a:xfrm>
+          <a:prstGeom prst="rect">
+            <a:avLst/>
+          </a:prstGeom>
+          <a:noFill/>
+        </p:spPr>
+        <p:txBody>
+          <a:bodyPr wrap="square" lIns="0" rIns="0" tIns="0" bIns="0" anchor="t">
+            <a:spAutoFit/>
+          </a:bodyPr>
+          <a:lstStyle/>
+          <a:p>
+            <a:pPr algn="r">
+              <a:spcBef>
+                <a:spcPts val="0"/>
+              </a:spcBef>
+              <a:spcAft>
+                <a:spcPts val="0"/>
+              </a:spcAft>
+            </a:pPr>
+            <a:r>
+              <a:rPr sz="900" b="1" i="0">
+                <a:solidFill>
+                  <a:srgbClr val="F1EEE7"/>
+                </a:solidFill>
+                <a:latin typeface="Aptos"/>
+              </a:rPr>
+              <a:t>PASS</a:t>
+            </a:r>
+          </a:p>
+        </p:txBody>
+      </p:sp>
+      <p:cxnSp>
+        <p:nvCxnSpPr>
+          <p:cNvPr id="18" name="Connector 17"/>
+          <p:cNvCxnSpPr/>
+          <p:nvPr/>
+        </p:nvCxnSpPr>
+        <p:spPr>
+          <a:xfrm>
+            <a:off x="6784848" y="4078224"/>
+            <a:ext cx="4279392" cy="0"/>
+          </a:xfrm>
+          <a:prstGeom prst="line">
+            <a:avLst/>
+          </a:prstGeom>
+          <a:ln w="7620">
+            <a:solidFill>
+              <a:srgbClr val="43575A"/>
+            </a:solidFill>
+          </a:ln>
+        </p:spPr>
+        <p:style>
+          <a:lnRef idx="2">
+            <a:schemeClr val="accent1"/>
+          </a:lnRef>
+          <a:fillRef idx="0">
+            <a:schemeClr val="accent1"/>
+          </a:fillRef>
+          <a:effectRef idx="1">
+            <a:schemeClr val="accent1"/>
+          </a:effectRef>
+          <a:fontRef idx="minor">
+            <a:schemeClr val="tx1"/>
+          </a:fontRef>
+        </p:style>
+      </p:cxnSp>
+      <p:sp>
+        <p:nvSpPr>
+          <p:cNvPr id="19" name="TextBox 18"/>
+          <p:cNvSpPr txBox="1"/>
+          <p:nvPr/>
+        </p:nvSpPr>
+        <p:spPr>
+          <a:xfrm>
+            <a:off x="6784848" y="4261104"/>
+            <a:ext cx="2011680" cy="201168"/>
+          </a:xfrm>
+          <a:prstGeom prst="rect">
+            <a:avLst/>
+          </a:prstGeom>
+          <a:noFill/>
+        </p:spPr>
+        <p:txBody>
+          <a:bodyPr wrap="square" lIns="0" rIns="0" tIns="0" bIns="0" anchor="t">
+            <a:spAutoFit/>
+          </a:bodyPr>
+          <a:lstStyle/>
+          <a:p>
+            <a:pPr algn="l">
+              <a:spcBef>
+                <a:spcPts val="0"/>
+              </a:spcBef>
+              <a:spcAft>
+                <a:spcPts val="0"/>
+              </a:spcAft>
+            </a:pPr>
+            <a:r>
+              <a:rPr sz="900" b="0" i="0">
+                <a:solidFill>
+                  <a:srgbClr val="D5D5DA"/>
+                </a:solidFill>
+                <a:latin typeface="Aptos"/>
+              </a:rPr>
+              <a:t>NAMED QUERIES</a:t>
+            </a:r>
+          </a:p>
+        </p:txBody>
+      </p:sp>
+      <p:sp>
+        <p:nvSpPr>
+          <p:cNvPr id="20" name="TextBox 19"/>
+          <p:cNvSpPr txBox="1"/>
+          <p:nvPr/>
+        </p:nvSpPr>
+        <p:spPr>
+          <a:xfrm>
+            <a:off x="9144000" y="4261104"/>
+            <a:ext cx="1920240" cy="201168"/>
+          </a:xfrm>
+          <a:prstGeom prst="rect">
+            <a:avLst/>
+          </a:prstGeom>
+          <a:noFill/>
+        </p:spPr>
+        <p:txBody>
+          <a:bodyPr wrap="square" lIns="0" rIns="0" tIns="0" bIns="0" anchor="t">
+            <a:spAutoFit/>
+          </a:bodyPr>
+          <a:lstStyle/>
+          <a:p>
+            <a:pPr algn="r">
+              <a:spcBef>
+                <a:spcPts val="0"/>
+              </a:spcBef>
+              <a:spcAft>
+                <a:spcPts val="0"/>
+              </a:spcAft>
+            </a:pPr>
+            <a:r>
+              <a:rPr sz="900" b="1" i="0">
+                <a:solidFill>
+                  <a:srgbClr val="F1EEE7"/>
+                </a:solidFill>
+                <a:latin typeface="Aptos"/>
+              </a:rPr>
+              <a:t>12</a:t>
+            </a:r>
+          </a:p>
+        </p:txBody>
+      </p:sp>
+      <p:cxnSp>
+        <p:nvCxnSpPr>
+          <p:cNvPr id="21" name="Connector 20"/>
+          <p:cNvCxnSpPr/>
+          <p:nvPr/>
+        </p:nvCxnSpPr>
+        <p:spPr>
+          <a:xfrm>
+            <a:off x="6784848" y="4553712"/>
+            <a:ext cx="4279392" cy="0"/>
+          </a:xfrm>
+          <a:prstGeom prst="line">
+            <a:avLst/>
+          </a:prstGeom>
+          <a:ln w="7620">
+            <a:solidFill>
+              <a:srgbClr val="43575A"/>
+            </a:solidFill>
+          </a:ln>
+        </p:spPr>
+        <p:style>
+          <a:lnRef idx="2">
+            <a:schemeClr val="accent1"/>
+          </a:lnRef>
+          <a:fillRef idx="0">
+            <a:schemeClr val="accent1"/>
+          </a:fillRef>
+          <a:effectRef idx="1">
+            <a:schemeClr val="accent1"/>
+          </a:effectRef>
+          <a:fontRef idx="minor">
+            <a:schemeClr val="tx1"/>
+          </a:fontRef>
+        </p:style>
+      </p:cxnSp>
+      <p:sp>
+        <p:nvSpPr>
+          <p:cNvPr id="22" name="TextBox 21"/>
+          <p:cNvSpPr txBox="1"/>
+          <p:nvPr/>
+        </p:nvSpPr>
+        <p:spPr>
+          <a:xfrm>
+            <a:off x="6784848" y="4736592"/>
+            <a:ext cx="2011680" cy="201168"/>
+          </a:xfrm>
+          <a:prstGeom prst="rect">
+            <a:avLst/>
+          </a:prstGeom>
+          <a:noFill/>
+        </p:spPr>
+        <p:txBody>
+          <a:bodyPr wrap="square" lIns="0" rIns="0" tIns="0" bIns="0" anchor="t">
+            <a:spAutoFit/>
+          </a:bodyPr>
+          <a:lstStyle/>
+          <a:p>
+            <a:pPr algn="l">
+              <a:spcBef>
+                <a:spcPts val="0"/>
+              </a:spcBef>
+              <a:spcAft>
+                <a:spcPts val="0"/>
+              </a:spcAft>
+            </a:pPr>
+            <a:r>
+              <a:rPr sz="900" b="0" i="0">
+                <a:solidFill>
+                  <a:srgbClr val="D5D5DA"/>
+                </a:solidFill>
+                <a:latin typeface="Aptos"/>
+              </a:rPr>
+              <a:t>EXPORTS</a:t>
+            </a:r>
+          </a:p>
+        </p:txBody>
+      </p:sp>
+      <p:sp>
+        <p:nvSpPr>
+          <p:cNvPr id="23" name="TextBox 22"/>
+          <p:cNvSpPr txBox="1"/>
+          <p:nvPr/>
+        </p:nvSpPr>
+        <p:spPr>
+          <a:xfrm>
+            <a:off x="9144000" y="4736592"/>
+            <a:ext cx="1920240" cy="201168"/>
+          </a:xfrm>
+          <a:prstGeom prst="rect">
+            <a:avLst/>
+          </a:prstGeom>
+          <a:noFill/>
+        </p:spPr>
+        <p:txBody>
+          <a:bodyPr wrap="square" lIns="0" rIns="0" tIns="0" bIns="0" anchor="t">
+            <a:spAutoFit/>
+          </a:bodyPr>
+          <a:lstStyle/>
+          <a:p>
+            <a:pPr algn="r">
+              <a:spcBef>
+                <a:spcPts val="0"/>
+              </a:spcBef>
+              <a:spcAft>
+                <a:spcPts val="0"/>
+              </a:spcAft>
+            </a:pPr>
+            <a:r>
+              <a:rPr sz="900" b="1" i="0">
+                <a:solidFill>
+                  <a:srgbClr val="F1EEE7"/>
+                </a:solidFill>
+                <a:latin typeface="Aptos"/>
+              </a:rPr>
+              <a:t>CSV + JSON</a:t>
+            </a:r>
+          </a:p>
+        </p:txBody>
+      </p:sp>
+      <p:cxnSp>
+        <p:nvCxnSpPr>
+          <p:cNvPr id="24" name="Connector 23"/>
+          <p:cNvCxnSpPr/>
+          <p:nvPr/>
+        </p:nvCxnSpPr>
+        <p:spPr>
+          <a:xfrm>
+            <a:off x="6784848" y="5029200"/>
+            <a:ext cx="4279392" cy="0"/>
+          </a:xfrm>
+          <a:prstGeom prst="line">
+            <a:avLst/>
+          </a:prstGeom>
+          <a:ln w="7620">
+            <a:solidFill>
+              <a:srgbClr val="43575A"/>
+            </a:solidFill>
+          </a:ln>
+        </p:spPr>
+        <p:style>
+          <a:lnRef idx="2">
+            <a:schemeClr val="accent1"/>
+          </a:lnRef>
+          <a:fillRef idx="0">
+            <a:schemeClr val="accent1"/>
+          </a:fillRef>
+          <a:effectRef idx="1">
+            <a:schemeClr val="accent1"/>
+          </a:effectRef>
+          <a:fontRef idx="minor">
+            <a:schemeClr val="tx1"/>
+          </a:fontRef>
+        </p:style>
+      </p:cxnSp>
+      <p:sp>
+        <p:nvSpPr>
+          <p:cNvPr id="25" name="TextBox 24"/>
+          <p:cNvSpPr txBox="1"/>
+          <p:nvPr/>
+        </p:nvSpPr>
+        <p:spPr>
+          <a:xfrm>
+            <a:off x="621792" y="6007608"/>
+            <a:ext cx="10561320" cy="219456"/>
+          </a:xfrm>
+          <a:prstGeom prst="rect">
+            <a:avLst/>
+          </a:prstGeom>
+          <a:noFill/>
+        </p:spPr>
+        <p:txBody>
+          <a:bodyPr wrap="square" lIns="0" rIns="0" tIns="0" bIns="0" anchor="t">
+            <a:spAutoFit/>
+          </a:bodyPr>
+          <a:lstStyle/>
+          <a:p>
+            <a:pPr algn="l">
+              <a:spcBef>
+                <a:spcPts val="0"/>
+              </a:spcBef>
+              <a:spcAft>
+                <a:spcPts val="0"/>
+              </a:spcAft>
+            </a:pPr>
+            <a:r>
+              <a:rPr sz="880" b="0" i="0">
+                <a:solidFill>
+                  <a:srgbClr val="85858B"/>
+                </a:solidFill>
+                <a:latin typeface="Aptos"/>
+              </a:rPr>
+              <a:t>Database source and field definitions are undocumented. Findings describe only the supplied sample.</a:t>
+            </a:r>
+          </a:p>
+        </p:txBody>
+      </p:sp>
+      <p:cxnSp>
+        <p:nvCxnSpPr>
+          <p:cNvPr id="26" name="Connector 25"/>
+          <p:cNvCxnSpPr/>
+          <p:nvPr/>
+        </p:nvCxnSpPr>
+        <p:spPr>
+          <a:xfrm>
+            <a:off x="566928" y="6446520"/>
+            <a:ext cx="11064240" cy="0"/>
+          </a:xfrm>
+          <a:prstGeom prst="line">
+            <a:avLst/>
+          </a:prstGeom>
+          <a:ln w="8255">
+            <a:solidFill>
+              <a:srgbClr val="37383F"/>
+            </a:solidFill>
+          </a:ln>
+        </p:spPr>
+        <p:style>
+          <a:lnRef idx="2">
+            <a:schemeClr val="accent1"/>
+          </a:lnRef>
+          <a:fillRef idx="0">
+            <a:schemeClr val="accent1"/>
+          </a:fillRef>
+          <a:effectRef idx="1">
+            <a:schemeClr val="accent1"/>
+          </a:effectRef>
+          <a:fontRef idx="minor">
+            <a:schemeClr val="tx1"/>
+          </a:fontRef>
+        </p:style>
+      </p:cxnSp>
+      <p:sp>
+        <p:nvSpPr>
+          <p:cNvPr id="27" name="TextBox 26"/>
+          <p:cNvSpPr txBox="1"/>
+          <p:nvPr/>
+        </p:nvSpPr>
+        <p:spPr>
+          <a:xfrm>
+            <a:off x="585216" y="6510528"/>
+            <a:ext cx="5486400" cy="164592"/>
+          </a:xfrm>
+          <a:prstGeom prst="rect">
+            <a:avLst/>
+          </a:prstGeom>
+          <a:noFill/>
+        </p:spPr>
+        <p:txBody>
+          <a:bodyPr wrap="square" lIns="0" rIns="0" tIns="0" bIns="0" anchor="t">
+            <a:spAutoFit/>
+          </a:bodyPr>
+          <a:lstStyle/>
+          <a:p>
+            <a:pPr algn="l">
+              <a:spcBef>
+                <a:spcPts val="0"/>
+              </a:spcBef>
+              <a:spcAft>
+                <a:spcPts val="0"/>
+              </a:spcAft>
+            </a:pPr>
+            <a:r>
+              <a:rPr sz="850" b="0" i="0">
+                <a:solidFill>
+                  <a:srgbClr val="85858B"/>
+                </a:solidFill>
+                <a:latin typeface="Aptos"/>
+              </a:rPr>
+              <a:t>Iyinoluwa Don-Taiwo</a:t>
+            </a:r>
+          </a:p>
+        </p:txBody>
+      </p:sp>
+      <p:sp>
+        <p:nvSpPr>
+          <p:cNvPr id="28" name="TextBox 27"/>
+          <p:cNvSpPr txBox="1"/>
+          <p:nvPr/>
+        </p:nvSpPr>
+        <p:spPr>
+          <a:xfrm>
+            <a:off x="10835640" y="6510528"/>
+            <a:ext cx="777240" cy="164592"/>
+          </a:xfrm>
+          <a:prstGeom prst="rect">
+            <a:avLst/>
+          </a:prstGeom>
+          <a:noFill/>
+        </p:spPr>
+        <p:txBody>
+          <a:bodyPr wrap="square" lIns="0" rIns="0" tIns="0" bIns="0" anchor="t">
+            <a:spAutoFit/>
+          </a:bodyPr>
+          <a:lstStyle/>
+          <a:p>
+            <a:pPr algn="r">
+              <a:spcBef>
+                <a:spcPts val="0"/>
+              </a:spcBef>
+              <a:spcAft>
+                <a:spcPts val="0"/>
+              </a:spcAft>
+            </a:pPr>
+            <a:r>
+              <a:rPr sz="850" b="0" i="0">
+                <a:solidFill>
+                  <a:srgbClr val="85858B"/>
+                </a:solidFill>
+                <a:latin typeface="Aptos"/>
+              </a:rPr>
+              <a:t>9 / 10</a:t>
             </a:r>
           </a:p>
         </p:txBody>
